--- a/data-eng/decks/w3d4s3.pptx
+++ b/data-eng/decks/w3d4s3.pptx
@@ -3100,7 +3100,7 @@
       <p:grpSpPr/>
       <p:sp>
         <p:nvSpPr>
-          <p:cNvPr id="2" name="Oval 1"/>
+          <p:cNvPr id="2" name="deckgen:decor"/>
           <p:cNvSpPr/>
           <p:nvPr/>
         </p:nvSpPr>
@@ -3130,7 +3130,7 @@
       </p:sp>
       <p:sp>
         <p:nvSpPr>
-          <p:cNvPr id="3" name="Oval 2"/>
+          <p:cNvPr id="3" name="deckgen:decor"/>
           <p:cNvSpPr/>
           <p:nvPr/>
         </p:nvSpPr>
@@ -3160,7 +3160,7 @@
       </p:sp>
       <p:sp>
         <p:nvSpPr>
-          <p:cNvPr id="4" name="Oval 3"/>
+          <p:cNvPr id="4" name="deckgen:decor"/>
           <p:cNvSpPr/>
           <p:nvPr/>
         </p:nvSpPr>
@@ -3190,7 +3190,7 @@
       </p:sp>
       <p:sp>
         <p:nvSpPr>
-          <p:cNvPr id="5" name="Rectangle 4"/>
+          <p:cNvPr id="5" name="deckgen:decor"/>
           <p:cNvSpPr/>
           <p:nvPr/>
         </p:nvSpPr>
@@ -3220,7 +3220,7 @@
       </p:sp>
       <p:sp>
         <p:nvSpPr>
-          <p:cNvPr id="6" name="Oval 5"/>
+          <p:cNvPr id="6" name="deckgen:decor"/>
           <p:cNvSpPr/>
           <p:nvPr/>
         </p:nvSpPr>
@@ -3250,7 +3250,7 @@
       </p:sp>
       <p:sp>
         <p:nvSpPr>
-          <p:cNvPr id="7" name="Oval 6"/>
+          <p:cNvPr id="7" name="deckgen:decor"/>
           <p:cNvSpPr/>
           <p:nvPr/>
         </p:nvSpPr>
@@ -3280,7 +3280,7 @@
       </p:sp>
       <p:sp>
         <p:nvSpPr>
-          <p:cNvPr id="8" name="Oval 7"/>
+          <p:cNvPr id="8" name="deckgen:decor"/>
           <p:cNvSpPr/>
           <p:nvPr/>
         </p:nvSpPr>
@@ -3310,7 +3310,7 @@
       </p:sp>
       <p:sp>
         <p:nvSpPr>
-          <p:cNvPr id="9" name="Oval 8"/>
+          <p:cNvPr id="9" name="deckgen:decor"/>
           <p:cNvSpPr/>
           <p:nvPr/>
         </p:nvSpPr>
@@ -3340,7 +3340,7 @@
       </p:sp>
       <p:sp>
         <p:nvSpPr>
-          <p:cNvPr id="10" name="Rectangle 9"/>
+          <p:cNvPr id="10" name="deckgen:decor"/>
           <p:cNvSpPr/>
           <p:nvPr/>
         </p:nvSpPr>
@@ -3600,7 +3600,7 @@
       <p:grpSpPr/>
       <p:sp>
         <p:nvSpPr>
-          <p:cNvPr id="2" name="Oval 1"/>
+          <p:cNvPr id="2" name="deckgen:decor"/>
           <p:cNvSpPr/>
           <p:nvPr/>
         </p:nvSpPr>
@@ -3630,7 +3630,7 @@
       </p:sp>
       <p:sp>
         <p:nvSpPr>
-          <p:cNvPr id="3" name="Oval 2"/>
+          <p:cNvPr id="3" name="deckgen:decor"/>
           <p:cNvSpPr/>
           <p:nvPr/>
         </p:nvSpPr>
@@ -3660,7 +3660,7 @@
       </p:sp>
       <p:sp>
         <p:nvSpPr>
-          <p:cNvPr id="4" name="Oval 3"/>
+          <p:cNvPr id="4" name="deckgen:decor"/>
           <p:cNvSpPr/>
           <p:nvPr/>
         </p:nvSpPr>
@@ -3941,7 +3941,7 @@
                 <a:ea typeface="Pretendard"/>
                 <a:cs typeface="Pretendard"/>
               </a:rPr>
-              <a:t>top 의 shape 가 (100, 2) 이고 grade 분포가 찍힌다</a:t>
+              <a:t>눈대중은 전원 S, 분위수 경계는 B 34 · A 34 · S 32</a:t>
             </a:r>
           </a:p>
         </p:txBody>
@@ -4233,7 +4233,7 @@
                 <a:ea typeface="Pretendard"/>
                 <a:cs typeface="Pretendard"/>
               </a:rPr>
-              <a:t>users 가 5만 행 안팎, seg 에 세그먼트 3종</a:t>
+              <a:t>(50000, 5) → (50000, 7) → 세그먼트 3종</a:t>
             </a:r>
           </a:p>
         </p:txBody>
@@ -4525,7 +4525,7 @@
                 <a:ea typeface="Pretendard"/>
                 <a:cs typeface="Pretendard"/>
               </a:rPr>
-              <a:t>전체 변환은 수백 MB, 집계 후 변환은 KB 단위</a:t>
+              <a:t>전체 변환 42 MB, 집계 후 변환 191 bytes</a:t>
             </a:r>
           </a:p>
         </p:txBody>
@@ -4662,7 +4662,7 @@
       <p:grpSpPr/>
       <p:sp>
         <p:nvSpPr>
-          <p:cNvPr id="2" name="Oval 1"/>
+          <p:cNvPr id="2" name="deckgen:decor"/>
           <p:cNvSpPr/>
           <p:nvPr/>
         </p:nvSpPr>
@@ -4692,7 +4692,7 @@
       </p:sp>
       <p:sp>
         <p:nvSpPr>
-          <p:cNvPr id="3" name="Oval 2"/>
+          <p:cNvPr id="3" name="deckgen:decor"/>
           <p:cNvSpPr/>
           <p:nvPr/>
         </p:nvSpPr>
@@ -5332,7 +5332,7 @@
                 <a:ea typeface="Pretendard"/>
                 <a:cs typeface="Pretendard"/>
               </a:rPr>
-              <a:t>3-5 예고 — 정제 파이프라인·품질 리포트</a:t>
+              <a:t>3-5 준비 — 원본 orders.csv 확인</a:t>
             </a:r>
           </a:p>
         </p:txBody>
@@ -5469,7 +5469,7 @@
       <p:grpSpPr/>
       <p:sp>
         <p:nvSpPr>
-          <p:cNvPr id="2" name="Oval 1"/>
+          <p:cNvPr id="2" name="deckgen:decor"/>
           <p:cNvSpPr/>
           <p:nvPr/>
         </p:nvSpPr>
@@ -5499,7 +5499,7 @@
       </p:sp>
       <p:sp>
         <p:nvSpPr>
-          <p:cNvPr id="3" name="Oval 2"/>
+          <p:cNvPr id="3" name="deckgen:decor"/>
           <p:cNvSpPr/>
           <p:nvPr/>
         </p:nvSpPr>
@@ -5529,7 +5529,7 @@
       </p:sp>
       <p:sp>
         <p:nvSpPr>
-          <p:cNvPr id="4" name="Oval 3"/>
+          <p:cNvPr id="4" name="deckgen:decor"/>
           <p:cNvSpPr/>
           <p:nvPr/>
         </p:nvSpPr>
@@ -5810,7 +5810,7 @@
                 <a:ea typeface="Pretendard"/>
                 <a:cs typeface="Pretendard"/>
               </a:rPr>
-              <a:t>LIMIT 100 결과를 .df() 로 받아 pd.cut 으로 등급을 매긴다</a:t>
+              <a:t>눈대중 경계가 전원 S 를 만드는 것을 보고 분위수로 고친다</a:t>
             </a:r>
           </a:p>
         </p:txBody>
@@ -6460,7 +6460,7 @@
       <p:grpSpPr/>
       <p:sp>
         <p:nvSpPr>
-          <p:cNvPr id="2" name="Oval 1"/>
+          <p:cNvPr id="2" name="deckgen:decor"/>
           <p:cNvSpPr/>
           <p:nvPr/>
         </p:nvSpPr>
@@ -6490,7 +6490,7 @@
       </p:sp>
       <p:sp>
         <p:nvSpPr>
-          <p:cNvPr id="3" name="Oval 2"/>
+          <p:cNvPr id="3" name="deckgen:decor"/>
           <p:cNvSpPr/>
           <p:nvPr/>
         </p:nvSpPr>
@@ -6520,7 +6520,7 @@
       </p:sp>
       <p:sp>
         <p:nvSpPr>
-          <p:cNvPr id="4" name="Oval 3"/>
+          <p:cNvPr id="4" name="deckgen:decor"/>
           <p:cNvSpPr/>
           <p:nvPr/>
         </p:nvSpPr>
@@ -6696,7 +6696,7 @@
                 <a:ea typeface="Pretendard"/>
                 <a:cs typeface="Pretendard"/>
               </a:rPr>
-              <a:t>무거운 집계는 DuckDB 가, 등급 매기기 같은 세밀한 가공은 Pandas 가 맡습니다</a:t>
+              <a:t>1~4단계는 roundtrip.py 에 이어 붙이기 · 5단계 df_cost.py · 6단계 funnel.py 는 단독</a:t>
             </a:r>
           </a:p>
         </p:txBody>
@@ -7457,7 +7457,7 @@
                 <a:ea typeface="Pretendard"/>
                 <a:cs typeface="Pretendard"/>
               </a:rPr>
-              <a:t>5·6. 실패·과제</a:t>
+              <a:t>5·6. 비용·과제</a:t>
             </a:r>
           </a:p>
         </p:txBody>
@@ -7653,7 +7653,7 @@
       <p:grpSpPr/>
       <p:sp>
         <p:nvSpPr>
-          <p:cNvPr id="2" name="Oval 1"/>
+          <p:cNvPr id="2" name="deckgen:decor"/>
           <p:cNvSpPr/>
           <p:nvPr/>
         </p:nvSpPr>
@@ -7683,7 +7683,7 @@
       </p:sp>
       <p:sp>
         <p:nvSpPr>
-          <p:cNvPr id="3" name="Oval 2"/>
+          <p:cNvPr id="3" name="deckgen:decor"/>
           <p:cNvSpPr/>
           <p:nvPr/>
         </p:nvSpPr>
@@ -7713,7 +7713,7 @@
       </p:sp>
       <p:sp>
         <p:nvSpPr>
-          <p:cNvPr id="4" name="Oval 3"/>
+          <p:cNvPr id="4" name="deckgen:decor"/>
           <p:cNvSpPr/>
           <p:nvPr/>
         </p:nvSpPr>
@@ -7777,7 +7777,7 @@
                 <a:ea typeface="Pretendard"/>
                 <a:cs typeface="Pretendard"/>
               </a:rPr>
-              <a:t>1단계</a:t>
+              <a:t>1단계 — 일부러 실패시키기</a:t>
             </a:r>
           </a:p>
         </p:txBody>
@@ -7818,7 +7818,7 @@
                 <a:ea typeface="Pretendard"/>
                 <a:cs typeface="Pretendard"/>
               </a:rPr>
-              <a:t>SQL 로 100명으로 줄이고 pd.cut 으로 등급</a:t>
+              <a:t>등급 경계를 눈대중으로 정하면 — 전원 S</a:t>
             </a:r>
           </a:p>
         </p:txBody>
@@ -7855,18 +7855,100 @@
       </p:sp>
       <p:sp>
         <p:nvSpPr>
-          <p:cNvPr id="8" name="Rounded Rectangle 7"/>
-          <p:cNvSpPr/>
-          <p:nvPr/>
-        </p:nvSpPr>
-        <p:spPr>
-          <a:xfrm>
-            <a:off x="1143000" y="2933700"/>
-            <a:ext cx="11430000" cy="1095375"/>
+          <p:cNvPr id="8" name="TextBox 7"/>
+          <p:cNvSpPr txBox="1"/>
+          <p:nvPr/>
+        </p:nvSpPr>
+        <p:spPr>
+          <a:xfrm>
+            <a:off x="1143000" y="2857500"/>
+            <a:ext cx="7372350" cy="533400"/>
+          </a:xfrm>
+          <a:prstGeom prst="rect">
+            <a:avLst/>
+          </a:prstGeom>
+          <a:noFill/>
+        </p:spPr>
+        <p:txBody>
+          <a:bodyPr wrap="square" lIns="0" rIns="0" tIns="0" bIns="0" anchor="t">
+            <a:spAutoFit/>
+          </a:bodyPr>
+          <a:lstStyle/>
+          <a:p>
+            <a:pPr algn="l">
+              <a:lnSpc>
+                <a:spcPct val="110000"/>
+              </a:lnSpc>
+            </a:pPr>
+            <a:r>
+              <a:rPr sz="3150" b="1">
+                <a:solidFill>
+                  <a:srgbClr val="0D2B5E"/>
+                </a:solidFill>
+                <a:latin typeface="Pretendard"/>
+                <a:ea typeface="Pretendard"/>
+                <a:cs typeface="Pretendard"/>
+              </a:rPr>
+              <a:t>실패 — bins 15000 · 25000</a:t>
+            </a:r>
+          </a:p>
+        </p:txBody>
+      </p:sp>
+      <p:sp>
+        <p:nvSpPr>
+          <p:cNvPr id="9" name="TextBox 8"/>
+          <p:cNvSpPr txBox="1"/>
+          <p:nvPr/>
+        </p:nvSpPr>
+        <p:spPr>
+          <a:xfrm>
+            <a:off x="1143000" y="3467100"/>
+            <a:ext cx="7372350" cy="876300"/>
+          </a:xfrm>
+          <a:prstGeom prst="rect">
+            <a:avLst/>
+          </a:prstGeom>
+          <a:noFill/>
+        </p:spPr>
+        <p:txBody>
+          <a:bodyPr wrap="square" lIns="0" rIns="0" tIns="0" bIns="0" anchor="t">
+            <a:spAutoFit/>
+          </a:bodyPr>
+          <a:lstStyle/>
+          <a:p>
+            <a:pPr algn="l">
+              <a:lnSpc>
+                <a:spcPct val="146000"/>
+              </a:lnSpc>
+            </a:pPr>
+            <a:r>
+              <a:rPr sz="2250" b="0">
+                <a:solidFill>
+                  <a:srgbClr val="3D3D3D"/>
+                </a:solidFill>
+                <a:latin typeface="Pretendard"/>
+                <a:ea typeface="Pretendard"/>
+                <a:cs typeface="Pretendard"/>
+              </a:rPr>
+              <a:t>상위 100명 spend 28700 ~ 44700</a:t>
+            </a:r>
+          </a:p>
+        </p:txBody>
+      </p:sp>
+      <p:sp>
+        <p:nvSpPr>
+          <p:cNvPr id="10" name="Rounded Rectangle 9"/>
+          <p:cNvSpPr/>
+          <p:nvPr/>
+        </p:nvSpPr>
+        <p:spPr>
+          <a:xfrm>
+            <a:off x="1143000" y="4610100"/>
+            <a:ext cx="7372350" cy="2857500"/>
           </a:xfrm>
           <a:prstGeom prst="roundRect">
             <a:avLst>
-              <a:gd name="adj" fmla="val 4347"/>
+              <a:gd name="adj" fmla="val 1666"/>
             </a:avLst>
           </a:prstGeom>
           <a:solidFill>
@@ -7889,16 +7971,16 @@
       </p:sp>
       <p:sp>
         <p:nvSpPr>
-          <p:cNvPr id="9" name="Oval 8"/>
-          <p:cNvSpPr/>
-          <p:nvPr/>
-        </p:nvSpPr>
-        <p:spPr>
-          <a:xfrm>
-            <a:off x="1447800" y="3181350"/>
-            <a:ext cx="590550" cy="590550"/>
-          </a:xfrm>
-          <a:prstGeom prst="ellipse">
+          <p:cNvPr id="11" name="Rectangle 10"/>
+          <p:cNvSpPr/>
+          <p:nvPr/>
+        </p:nvSpPr>
+        <p:spPr>
+          <a:xfrm>
+            <a:off x="1390650" y="4838700"/>
+            <a:ext cx="672167" cy="485775"/>
+          </a:xfrm>
+          <a:prstGeom prst="rect">
             <a:avLst/>
           </a:prstGeom>
           <a:solidFill>
@@ -7919,22 +8001,22 @@
       </p:sp>
       <p:sp>
         <p:nvSpPr>
-          <p:cNvPr id="10" name="TextBox 9"/>
-          <p:cNvSpPr txBox="1"/>
-          <p:nvPr/>
-        </p:nvSpPr>
-        <p:spPr>
-          <a:xfrm>
-            <a:off x="1447800" y="3333750"/>
-            <a:ext cx="590550" cy="323850"/>
-          </a:xfrm>
-          <a:prstGeom prst="rect">
-            <a:avLst/>
-          </a:prstGeom>
-          <a:noFill/>
-        </p:spPr>
-        <p:txBody>
-          <a:bodyPr wrap="square" lIns="0" rIns="0" tIns="0" bIns="0" anchor="t">
+          <p:cNvPr id="12" name="TextBox 11"/>
+          <p:cNvSpPr txBox="1"/>
+          <p:nvPr/>
+        </p:nvSpPr>
+        <p:spPr>
+          <a:xfrm>
+            <a:off x="1390650" y="4838700"/>
+            <a:ext cx="672167" cy="485775"/>
+          </a:xfrm>
+          <a:prstGeom prst="rect">
+            <a:avLst/>
+          </a:prstGeom>
+          <a:noFill/>
+        </p:spPr>
+        <p:txBody>
+          <a:bodyPr wrap="square" lIns="0" rIns="0" tIns="0" bIns="0" anchor="ctr">
             <a:spAutoFit/>
           </a:bodyPr>
           <a:lstStyle/>
@@ -7945,7 +8027,7 @@
               </a:lnSpc>
             </a:pPr>
             <a:r>
-              <a:rPr sz="2250" b="1">
+              <a:rPr sz="1500" b="1">
                 <a:solidFill>
                   <a:srgbClr val="FFFFFF"/>
                 </a:solidFill>
@@ -7953,108 +8035,24 @@
                 <a:ea typeface="Pretendard"/>
                 <a:cs typeface="Pretendard"/>
               </a:rPr>
-              <a:t>1</a:t>
-            </a:r>
-          </a:p>
-        </p:txBody>
-      </p:sp>
-      <p:sp>
-        <p:nvSpPr>
-          <p:cNvPr id="11" name="TextBox 10"/>
-          <p:cNvSpPr txBox="1"/>
-          <p:nvPr/>
-        </p:nvSpPr>
-        <p:spPr>
-          <a:xfrm>
-            <a:off x="2324100" y="3143250"/>
-            <a:ext cx="9906000" cy="400050"/>
-          </a:xfrm>
-          <a:prstGeom prst="rect">
-            <a:avLst/>
-          </a:prstGeom>
-          <a:noFill/>
-        </p:spPr>
-        <p:txBody>
-          <a:bodyPr wrap="square" lIns="0" rIns="0" tIns="0" bIns="0" anchor="t">
-            <a:spAutoFit/>
-          </a:bodyPr>
-          <a:lstStyle/>
-          <a:p>
-            <a:pPr algn="l">
-              <a:lnSpc>
-                <a:spcPct val="110000"/>
-              </a:lnSpc>
-            </a:pPr>
-            <a:r>
-              <a:rPr sz="2475" b="1">
-                <a:solidFill>
-                  <a:srgbClr val="0D2B5E"/>
-                </a:solidFill>
-                <a:latin typeface="Pretendard"/>
-                <a:ea typeface="Pretendard"/>
-                <a:cs typeface="Pretendard"/>
-              </a:rPr>
-              <a:t>duckdb.sql("…").df()</a:t>
-            </a:r>
-          </a:p>
-        </p:txBody>
-      </p:sp>
-      <p:sp>
-        <p:nvSpPr>
-          <p:cNvPr id="12" name="TextBox 11"/>
-          <p:cNvSpPr txBox="1"/>
-          <p:nvPr/>
-        </p:nvSpPr>
-        <p:spPr>
-          <a:xfrm>
-            <a:off x="2324100" y="3543300"/>
-            <a:ext cx="9906000" cy="361950"/>
-          </a:xfrm>
-          <a:prstGeom prst="rect">
-            <a:avLst/>
-          </a:prstGeom>
-          <a:noFill/>
-        </p:spPr>
-        <p:txBody>
-          <a:bodyPr wrap="square" lIns="0" rIns="0" tIns="0" bIns="0" anchor="t">
-            <a:spAutoFit/>
-          </a:bodyPr>
-          <a:lstStyle/>
-          <a:p>
-            <a:pPr algn="l">
-              <a:lnSpc>
-                <a:spcPct val="120000"/>
-              </a:lnSpc>
-            </a:pPr>
-            <a:r>
-              <a:rPr sz="2025" b="0">
-                <a:solidFill>
-                  <a:srgbClr val="3D3D3D"/>
-                </a:solidFill>
-                <a:latin typeface="Pretendard"/>
-                <a:ea typeface="Pretendard"/>
-                <a:cs typeface="Pretendard"/>
-              </a:rPr>
-              <a:t>buy 만 user_id 로 묶어 spend DESC LIMIT 100 — shape (100, 2)</a:t>
-            </a:r>
-          </a:p>
-        </p:txBody>
-      </p:sp>
-      <p:sp>
-        <p:nvSpPr>
-          <p:cNvPr id="13" name="Rounded Rectangle 12"/>
-          <p:cNvSpPr/>
-          <p:nvPr/>
-        </p:nvSpPr>
-        <p:spPr>
-          <a:xfrm>
-            <a:off x="1143000" y="4200525"/>
-            <a:ext cx="11430000" cy="1095375"/>
-          </a:xfrm>
-          <a:prstGeom prst="roundRect">
-            <a:avLst>
-              <a:gd name="adj" fmla="val 4347"/>
-            </a:avLst>
+              <a:t>경계</a:t>
+            </a:r>
+          </a:p>
+        </p:txBody>
+      </p:sp>
+      <p:sp>
+        <p:nvSpPr>
+          <p:cNvPr id="13" name="Rectangle 12"/>
+          <p:cNvSpPr/>
+          <p:nvPr/>
+        </p:nvSpPr>
+        <p:spPr>
+          <a:xfrm>
+            <a:off x="2062817" y="4838700"/>
+            <a:ext cx="6204883" cy="485775"/>
+          </a:xfrm>
+          <a:prstGeom prst="rect">
+            <a:avLst/>
           </a:prstGeom>
           <a:solidFill>
             <a:srgbClr val="FAFBFD"/>
@@ -8076,16 +8074,57 @@
       </p:sp>
       <p:sp>
         <p:nvSpPr>
-          <p:cNvPr id="14" name="Oval 13"/>
-          <p:cNvSpPr/>
-          <p:nvPr/>
-        </p:nvSpPr>
-        <p:spPr>
-          <a:xfrm>
-            <a:off x="1447800" y="4448175"/>
-            <a:ext cx="590550" cy="590550"/>
-          </a:xfrm>
-          <a:prstGeom prst="ellipse">
+          <p:cNvPr id="14" name="TextBox 13"/>
+          <p:cNvSpPr txBox="1"/>
+          <p:nvPr/>
+        </p:nvSpPr>
+        <p:spPr>
+          <a:xfrm>
+            <a:off x="2215217" y="4838700"/>
+            <a:ext cx="5900083" cy="485775"/>
+          </a:xfrm>
+          <a:prstGeom prst="rect">
+            <a:avLst/>
+          </a:prstGeom>
+          <a:noFill/>
+        </p:spPr>
+        <p:txBody>
+          <a:bodyPr wrap="square" lIns="0" rIns="0" tIns="0" bIns="0" anchor="ctr">
+            <a:spAutoFit/>
+          </a:bodyPr>
+          <a:lstStyle/>
+          <a:p>
+            <a:pPr algn="l">
+              <a:lnSpc>
+                <a:spcPct val="115000"/>
+              </a:lnSpc>
+            </a:pPr>
+            <a:r>
+              <a:rPr sz="1500" b="0">
+                <a:solidFill>
+                  <a:srgbClr val="3D3D3D"/>
+                </a:solidFill>
+                <a:latin typeface="Pretendard"/>
+                <a:ea typeface="Pretendard"/>
+                <a:cs typeface="Pretendard"/>
+              </a:rPr>
+              <a:t>[0, 15000, 25000, inf]</a:t>
+            </a:r>
+          </a:p>
+        </p:txBody>
+      </p:sp>
+      <p:sp>
+        <p:nvSpPr>
+          <p:cNvPr id="15" name="Rectangle 14"/>
+          <p:cNvSpPr/>
+          <p:nvPr/>
+        </p:nvSpPr>
+        <p:spPr>
+          <a:xfrm>
+            <a:off x="1390650" y="5400675"/>
+            <a:ext cx="672167" cy="485775"/>
+          </a:xfrm>
+          <a:prstGeom prst="rect">
             <a:avLst/>
           </a:prstGeom>
           <a:solidFill>
@@ -8106,22 +8145,22 @@
       </p:sp>
       <p:sp>
         <p:nvSpPr>
-          <p:cNvPr id="15" name="TextBox 14"/>
-          <p:cNvSpPr txBox="1"/>
-          <p:nvPr/>
-        </p:nvSpPr>
-        <p:spPr>
-          <a:xfrm>
-            <a:off x="1447800" y="4600575"/>
-            <a:ext cx="590550" cy="323850"/>
-          </a:xfrm>
-          <a:prstGeom prst="rect">
-            <a:avLst/>
-          </a:prstGeom>
-          <a:noFill/>
-        </p:spPr>
-        <p:txBody>
-          <a:bodyPr wrap="square" lIns="0" rIns="0" tIns="0" bIns="0" anchor="t">
+          <p:cNvPr id="16" name="TextBox 15"/>
+          <p:cNvSpPr txBox="1"/>
+          <p:nvPr/>
+        </p:nvSpPr>
+        <p:spPr>
+          <a:xfrm>
+            <a:off x="1390650" y="5400675"/>
+            <a:ext cx="672167" cy="485775"/>
+          </a:xfrm>
+          <a:prstGeom prst="rect">
+            <a:avLst/>
+          </a:prstGeom>
+          <a:noFill/>
+        </p:spPr>
+        <p:txBody>
+          <a:bodyPr wrap="square" lIns="0" rIns="0" tIns="0" bIns="0" anchor="ctr">
             <a:spAutoFit/>
           </a:bodyPr>
           <a:lstStyle/>
@@ -8132,7 +8171,7 @@
               </a:lnSpc>
             </a:pPr>
             <a:r>
-              <a:rPr sz="2250" b="1">
+              <a:rPr sz="1500" b="1">
                 <a:solidFill>
                   <a:srgbClr val="FFFFFF"/>
                 </a:solidFill>
@@ -8140,108 +8179,24 @@
                 <a:ea typeface="Pretendard"/>
                 <a:cs typeface="Pretendard"/>
               </a:rPr>
-              <a:t>2</a:t>
-            </a:r>
-          </a:p>
-        </p:txBody>
-      </p:sp>
-      <p:sp>
-        <p:nvSpPr>
-          <p:cNvPr id="16" name="TextBox 15"/>
-          <p:cNvSpPr txBox="1"/>
-          <p:nvPr/>
-        </p:nvSpPr>
-        <p:spPr>
-          <a:xfrm>
-            <a:off x="2324100" y="4410075"/>
-            <a:ext cx="9906000" cy="400050"/>
-          </a:xfrm>
-          <a:prstGeom prst="rect">
-            <a:avLst/>
-          </a:prstGeom>
-          <a:noFill/>
-        </p:spPr>
-        <p:txBody>
-          <a:bodyPr wrap="square" lIns="0" rIns="0" tIns="0" bIns="0" anchor="t">
-            <a:spAutoFit/>
-          </a:bodyPr>
-          <a:lstStyle/>
-          <a:p>
-            <a:pPr algn="l">
-              <a:lnSpc>
-                <a:spcPct val="110000"/>
-              </a:lnSpc>
-            </a:pPr>
-            <a:r>
-              <a:rPr sz="2475" b="1">
-                <a:solidFill>
-                  <a:srgbClr val="0D2B5E"/>
-                </a:solidFill>
-                <a:latin typeface="Pretendard"/>
-                <a:ea typeface="Pretendard"/>
-                <a:cs typeface="Pretendard"/>
-              </a:rPr>
-              <a:t>pd.cut(top['spend'], bins=…)</a:t>
-            </a:r>
-          </a:p>
-        </p:txBody>
-      </p:sp>
-      <p:sp>
-        <p:nvSpPr>
-          <p:cNvPr id="17" name="TextBox 16"/>
-          <p:cNvSpPr txBox="1"/>
-          <p:nvPr/>
-        </p:nvSpPr>
-        <p:spPr>
-          <a:xfrm>
-            <a:off x="2324100" y="4810125"/>
-            <a:ext cx="9906000" cy="361950"/>
-          </a:xfrm>
-          <a:prstGeom prst="rect">
-            <a:avLst/>
-          </a:prstGeom>
-          <a:noFill/>
-        </p:spPr>
-        <p:txBody>
-          <a:bodyPr wrap="square" lIns="0" rIns="0" tIns="0" bIns="0" anchor="t">
-            <a:spAutoFit/>
-          </a:bodyPr>
-          <a:lstStyle/>
-          <a:p>
-            <a:pPr algn="l">
-              <a:lnSpc>
-                <a:spcPct val="120000"/>
-              </a:lnSpc>
-            </a:pPr>
-            <a:r>
-              <a:rPr sz="2025" b="0">
-                <a:solidFill>
-                  <a:srgbClr val="3D3D3D"/>
-                </a:solidFill>
-                <a:latin typeface="Pretendard"/>
-                <a:ea typeface="Pretendard"/>
-                <a:cs typeface="Pretendard"/>
-              </a:rPr>
-              <a:t>[0, 15000, 25000, inf] 경계로 B·A·S 라벨</a:t>
-            </a:r>
-          </a:p>
-        </p:txBody>
-      </p:sp>
-      <p:sp>
-        <p:nvSpPr>
-          <p:cNvPr id="18" name="Rounded Rectangle 17"/>
-          <p:cNvSpPr/>
-          <p:nvPr/>
-        </p:nvSpPr>
-        <p:spPr>
-          <a:xfrm>
-            <a:off x="1143000" y="5467350"/>
-            <a:ext cx="11430000" cy="1095375"/>
-          </a:xfrm>
-          <a:prstGeom prst="roundRect">
-            <a:avLst>
-              <a:gd name="adj" fmla="val 4347"/>
-            </a:avLst>
+              <a:t>결과</a:t>
+            </a:r>
+          </a:p>
+        </p:txBody>
+      </p:sp>
+      <p:sp>
+        <p:nvSpPr>
+          <p:cNvPr id="17" name="Rectangle 16"/>
+          <p:cNvSpPr/>
+          <p:nvPr/>
+        </p:nvSpPr>
+        <p:spPr>
+          <a:xfrm>
+            <a:off x="2062817" y="5400675"/>
+            <a:ext cx="6204883" cy="485775"/>
+          </a:xfrm>
+          <a:prstGeom prst="rect">
+            <a:avLst/>
           </a:prstGeom>
           <a:solidFill>
             <a:srgbClr val="FAFBFD"/>
@@ -8263,16 +8218,57 @@
       </p:sp>
       <p:sp>
         <p:nvSpPr>
-          <p:cNvPr id="19" name="Oval 18"/>
-          <p:cNvSpPr/>
-          <p:nvPr/>
-        </p:nvSpPr>
-        <p:spPr>
-          <a:xfrm>
-            <a:off x="1447800" y="5715000"/>
-            <a:ext cx="590550" cy="590550"/>
-          </a:xfrm>
-          <a:prstGeom prst="ellipse">
+          <p:cNvPr id="18" name="TextBox 17"/>
+          <p:cNvSpPr txBox="1"/>
+          <p:nvPr/>
+        </p:nvSpPr>
+        <p:spPr>
+          <a:xfrm>
+            <a:off x="2215217" y="5400675"/>
+            <a:ext cx="5900083" cy="485775"/>
+          </a:xfrm>
+          <a:prstGeom prst="rect">
+            <a:avLst/>
+          </a:prstGeom>
+          <a:noFill/>
+        </p:spPr>
+        <p:txBody>
+          <a:bodyPr wrap="square" lIns="0" rIns="0" tIns="0" bIns="0" anchor="ctr">
+            <a:spAutoFit/>
+          </a:bodyPr>
+          <a:lstStyle/>
+          <a:p>
+            <a:pPr algn="l">
+              <a:lnSpc>
+                <a:spcPct val="115000"/>
+              </a:lnSpc>
+            </a:pPr>
+            <a:r>
+              <a:rPr sz="1500" b="0">
+                <a:solidFill>
+                  <a:srgbClr val="3D3D3D"/>
+                </a:solidFill>
+                <a:latin typeface="Pretendard"/>
+                <a:ea typeface="Pretendard"/>
+                <a:cs typeface="Pretendard"/>
+              </a:rPr>
+              <a:t>S 100 · B 0 · A 0</a:t>
+            </a:r>
+          </a:p>
+        </p:txBody>
+      </p:sp>
+      <p:sp>
+        <p:nvSpPr>
+          <p:cNvPr id="19" name="Rectangle 18"/>
+          <p:cNvSpPr/>
+          <p:nvPr/>
+        </p:nvSpPr>
+        <p:spPr>
+          <a:xfrm>
+            <a:off x="1390650" y="5962650"/>
+            <a:ext cx="672167" cy="485775"/>
+          </a:xfrm>
+          <a:prstGeom prst="rect">
             <a:avLst/>
           </a:prstGeom>
           <a:solidFill>
@@ -8299,8 +8295,122 @@
         </p:nvSpPr>
         <p:spPr>
           <a:xfrm>
-            <a:off x="1447800" y="5867400"/>
-            <a:ext cx="590550" cy="323850"/>
+            <a:off x="1390650" y="5962650"/>
+            <a:ext cx="672167" cy="485775"/>
+          </a:xfrm>
+          <a:prstGeom prst="rect">
+            <a:avLst/>
+          </a:prstGeom>
+          <a:noFill/>
+        </p:spPr>
+        <p:txBody>
+          <a:bodyPr wrap="square" lIns="0" rIns="0" tIns="0" bIns="0" anchor="ctr">
+            <a:spAutoFit/>
+          </a:bodyPr>
+          <a:lstStyle/>
+          <a:p>
+            <a:pPr algn="ctr">
+              <a:lnSpc>
+                <a:spcPct val="100000"/>
+              </a:lnSpc>
+            </a:pPr>
+            <a:r>
+              <a:rPr sz="1500" b="1">
+                <a:solidFill>
+                  <a:srgbClr val="FFFFFF"/>
+                </a:solidFill>
+                <a:latin typeface="Pretendard"/>
+                <a:ea typeface="Pretendard"/>
+                <a:cs typeface="Pretendard"/>
+              </a:rPr>
+              <a:t>이유</a:t>
+            </a:r>
+          </a:p>
+        </p:txBody>
+      </p:sp>
+      <p:sp>
+        <p:nvSpPr>
+          <p:cNvPr id="21" name="Rectangle 20"/>
+          <p:cNvSpPr/>
+          <p:nvPr/>
+        </p:nvSpPr>
+        <p:spPr>
+          <a:xfrm>
+            <a:off x="2062817" y="5962650"/>
+            <a:ext cx="6204883" cy="485775"/>
+          </a:xfrm>
+          <a:prstGeom prst="rect">
+            <a:avLst/>
+          </a:prstGeom>
+          <a:solidFill>
+            <a:srgbClr val="FAFBFD"/>
+          </a:solidFill>
+          <a:ln w="9525">
+            <a:solidFill>
+              <a:srgbClr val="DCE1E8"/>
+            </a:solidFill>
+          </a:ln>
+          <a:effectLst/>
+        </p:spPr>
+        <p:txBody>
+          <a:bodyPr rtlCol="0" anchor="ctr" wrap="square"/>
+          <a:lstStyle/>
+          <a:p>
+            <a:pPr algn="ctr"/>
+          </a:p>
+        </p:txBody>
+      </p:sp>
+      <p:sp>
+        <p:nvSpPr>
+          <p:cNvPr id="22" name="TextBox 21"/>
+          <p:cNvSpPr txBox="1"/>
+          <p:nvPr/>
+        </p:nvSpPr>
+        <p:spPr>
+          <a:xfrm>
+            <a:off x="2215217" y="5962650"/>
+            <a:ext cx="5900083" cy="485775"/>
+          </a:xfrm>
+          <a:prstGeom prst="rect">
+            <a:avLst/>
+          </a:prstGeom>
+          <a:noFill/>
+        </p:spPr>
+        <p:txBody>
+          <a:bodyPr wrap="square" lIns="0" rIns="0" tIns="0" bIns="0" anchor="ctr">
+            <a:spAutoFit/>
+          </a:bodyPr>
+          <a:lstStyle/>
+          <a:p>
+            <a:pPr algn="l">
+              <a:lnSpc>
+                <a:spcPct val="115000"/>
+              </a:lnSpc>
+            </a:pPr>
+            <a:r>
+              <a:rPr sz="1500" b="0">
+                <a:solidFill>
+                  <a:srgbClr val="3D3D3D"/>
+                </a:solidFill>
+                <a:latin typeface="Pretendard"/>
+                <a:ea typeface="Pretendard"/>
+                <a:cs typeface="Pretendard"/>
+              </a:rPr>
+              <a:t>전원 28,700 이상</a:t>
+            </a:r>
+          </a:p>
+        </p:txBody>
+      </p:sp>
+      <p:sp>
+        <p:nvSpPr>
+          <p:cNvPr id="23" name="TextBox 22"/>
+          <p:cNvSpPr txBox="1"/>
+          <p:nvPr/>
+        </p:nvSpPr>
+        <p:spPr>
+          <a:xfrm>
+            <a:off x="9772650" y="2857500"/>
+            <a:ext cx="7372350" cy="533400"/>
           </a:xfrm>
           <a:prstGeom prst="rect">
             <a:avLst/>
@@ -8313,35 +8423,35 @@
           </a:bodyPr>
           <a:lstStyle/>
           <a:p>
-            <a:pPr algn="ctr">
-              <a:lnSpc>
-                <a:spcPct val="100000"/>
-              </a:lnSpc>
-            </a:pPr>
-            <a:r>
-              <a:rPr sz="2250" b="1">
-                <a:solidFill>
-                  <a:srgbClr val="FFFFFF"/>
-                </a:solidFill>
-                <a:latin typeface="Pretendard"/>
-                <a:ea typeface="Pretendard"/>
-                <a:cs typeface="Pretendard"/>
-              </a:rPr>
-              <a:t>3</a:t>
-            </a:r>
-          </a:p>
-        </p:txBody>
-      </p:sp>
-      <p:sp>
-        <p:nvSpPr>
-          <p:cNvPr id="21" name="TextBox 20"/>
-          <p:cNvSpPr txBox="1"/>
-          <p:nvPr/>
-        </p:nvSpPr>
-        <p:spPr>
-          <a:xfrm>
-            <a:off x="2324100" y="5676900"/>
-            <a:ext cx="9906000" cy="400050"/>
+            <a:pPr algn="l">
+              <a:lnSpc>
+                <a:spcPct val="110000"/>
+              </a:lnSpc>
+            </a:pPr>
+            <a:r>
+              <a:rPr sz="3150" b="1">
+                <a:solidFill>
+                  <a:srgbClr val="0D2B5E"/>
+                </a:solidFill>
+                <a:latin typeface="Pretendard"/>
+                <a:ea typeface="Pretendard"/>
+                <a:cs typeface="Pretendard"/>
+              </a:rPr>
+              <a:t>해결 — 분위수 경계 grade2</a:t>
+            </a:r>
+          </a:p>
+        </p:txBody>
+      </p:sp>
+      <p:sp>
+        <p:nvSpPr>
+          <p:cNvPr id="24" name="TextBox 23"/>
+          <p:cNvSpPr txBox="1"/>
+          <p:nvPr/>
+        </p:nvSpPr>
+        <p:spPr>
+          <a:xfrm>
+            <a:off x="9772650" y="3467100"/>
+            <a:ext cx="7372350" cy="876300"/>
           </a:xfrm>
           <a:prstGeom prst="rect">
             <a:avLst/>
@@ -8356,52 +8466,11 @@
           <a:p>
             <a:pPr algn="l">
               <a:lnSpc>
-                <a:spcPct val="110000"/>
-              </a:lnSpc>
-            </a:pPr>
-            <a:r>
-              <a:rPr sz="2475" b="1">
-                <a:solidFill>
-                  <a:srgbClr val="0D2B5E"/>
-                </a:solidFill>
-                <a:latin typeface="Pretendard"/>
-                <a:ea typeface="Pretendard"/>
-                <a:cs typeface="Pretendard"/>
-              </a:rPr>
-              <a:t>경계는 분위수로도</a:t>
-            </a:r>
-          </a:p>
-        </p:txBody>
-      </p:sp>
-      <p:sp>
-        <p:nvSpPr>
-          <p:cNvPr id="22" name="TextBox 21"/>
-          <p:cNvSpPr txBox="1"/>
-          <p:nvPr/>
-        </p:nvSpPr>
-        <p:spPr>
-          <a:xfrm>
-            <a:off x="2324100" y="6076950"/>
-            <a:ext cx="9906000" cy="361950"/>
-          </a:xfrm>
-          <a:prstGeom prst="rect">
-            <a:avLst/>
-          </a:prstGeom>
-          <a:noFill/>
-        </p:spPr>
-        <p:txBody>
-          <a:bodyPr wrap="square" lIns="0" rIns="0" tIns="0" bIns="0" anchor="t">
-            <a:spAutoFit/>
-          </a:bodyPr>
-          <a:lstStyle/>
-          <a:p>
-            <a:pPr algn="l">
-              <a:lnSpc>
-                <a:spcPct val="120000"/>
-              </a:lnSpc>
-            </a:pPr>
-            <a:r>
-              <a:rPr sz="2025" b="0">
+                <a:spcPct val="146000"/>
+              </a:lnSpc>
+            </a:pPr>
+            <a:r>
+              <a:rPr sz="2250" b="0">
                 <a:solidFill>
                   <a:srgbClr val="3D3D3D"/>
                 </a:solidFill>
@@ -8409,33 +8478,33 @@
                 <a:ea typeface="Pretendard"/>
                 <a:cs typeface="Pretendard"/>
               </a:rPr>
-              <a:t>quantile([0.33, 0.66]) 로 정하면 세 등급이 대체로 균등</a:t>
-            </a:r>
-          </a:p>
-        </p:txBody>
-      </p:sp>
-      <p:sp>
-        <p:nvSpPr>
-          <p:cNvPr id="23" name="Rounded Rectangle 22"/>
-          <p:cNvSpPr/>
-          <p:nvPr/>
-        </p:nvSpPr>
-        <p:spPr>
-          <a:xfrm>
-            <a:off x="13144500" y="2933700"/>
-            <a:ext cx="4000500" cy="3629025"/>
+              <a:t>quantile([0.33, 0.66]) 로 데이터에서</a:t>
+            </a:r>
+          </a:p>
+        </p:txBody>
+      </p:sp>
+      <p:sp>
+        <p:nvSpPr>
+          <p:cNvPr id="25" name="Rounded Rectangle 24"/>
+          <p:cNvSpPr/>
+          <p:nvPr/>
+        </p:nvSpPr>
+        <p:spPr>
+          <a:xfrm>
+            <a:off x="9772650" y="4610100"/>
+            <a:ext cx="7372350" cy="2857500"/>
           </a:xfrm>
           <a:prstGeom prst="roundRect">
             <a:avLst>
-              <a:gd name="adj" fmla="val 1312"/>
+              <a:gd name="adj" fmla="val 1666"/>
             </a:avLst>
           </a:prstGeom>
           <a:solidFill>
-            <a:srgbClr val="EDF3FD"/>
+            <a:srgbClr val="FAFBFD"/>
           </a:solidFill>
           <a:ln w="9525">
             <a:solidFill>
-              <a:srgbClr val="BFD3F5"/>
+              <a:srgbClr val="DCE1E8"/>
             </a:solidFill>
           </a:ln>
           <a:effectLst/>
@@ -8450,120 +8519,20 @@
       </p:sp>
       <p:sp>
         <p:nvSpPr>
-          <p:cNvPr id="24" name="TextBox 23"/>
-          <p:cNvSpPr txBox="1"/>
-          <p:nvPr/>
-        </p:nvSpPr>
-        <p:spPr>
-          <a:xfrm>
-            <a:off x="13487400" y="3929062"/>
-            <a:ext cx="3314700" cy="304800"/>
-          </a:xfrm>
-          <a:prstGeom prst="rect">
-            <a:avLst/>
-          </a:prstGeom>
-          <a:noFill/>
-        </p:spPr>
-        <p:txBody>
-          <a:bodyPr wrap="square" lIns="0" rIns="0" tIns="0" bIns="0" anchor="t">
-            <a:spAutoFit/>
-          </a:bodyPr>
-          <a:lstStyle/>
-          <a:p>
-            <a:pPr algn="l">
-              <a:lnSpc>
-                <a:spcPct val="100000"/>
-              </a:lnSpc>
-            </a:pPr>
-            <a:r>
-              <a:rPr sz="1800" b="1" spc="190">
-                <a:solidFill>
-                  <a:srgbClr val="1E5BC6"/>
-                </a:solidFill>
-                <a:latin typeface="Pretendard"/>
-                <a:ea typeface="Pretendard"/>
-                <a:cs typeface="Pretendard"/>
-              </a:rPr>
-              <a:t>확인</a:t>
-            </a:r>
-          </a:p>
-        </p:txBody>
-      </p:sp>
-      <p:sp>
-        <p:nvSpPr>
-          <p:cNvPr id="25" name="TextBox 24"/>
-          <p:cNvSpPr txBox="1"/>
-          <p:nvPr/>
-        </p:nvSpPr>
-        <p:spPr>
-          <a:xfrm>
-            <a:off x="13487400" y="4329112"/>
-            <a:ext cx="3314700" cy="1238250"/>
-          </a:xfrm>
-          <a:prstGeom prst="rect">
-            <a:avLst/>
-          </a:prstGeom>
-          <a:noFill/>
-        </p:spPr>
-        <p:txBody>
-          <a:bodyPr wrap="square" lIns="0" rIns="0" tIns="0" bIns="0" anchor="t">
-            <a:spAutoFit/>
-          </a:bodyPr>
-          <a:lstStyle/>
-          <a:p>
-            <a:pPr algn="l">
-              <a:lnSpc>
-                <a:spcPct val="138000"/>
-              </a:lnSpc>
-            </a:pPr>
-            <a:r>
-              <a:rPr sz="2700" b="1">
-                <a:solidFill>
-                  <a:srgbClr val="0D2B5E"/>
-                </a:solidFill>
-                <a:latin typeface="Pretendard"/>
-                <a:ea typeface="Pretendard"/>
-                <a:cs typeface="Pretendard"/>
-              </a:rPr>
-              <a:t>type 이</a:t>
-            </a:r>
-          </a:p>
-          <a:p>
-            <a:pPr algn="l">
-              <a:lnSpc>
-                <a:spcPct val="138000"/>
-              </a:lnSpc>
-            </a:pPr>
-            <a:r>
-              <a:rPr sz="2700" b="1">
-                <a:solidFill>
-                  <a:srgbClr val="0D2B5E"/>
-                </a:solidFill>
-                <a:latin typeface="Pretendard"/>
-                <a:ea typeface="Pretendard"/>
-                <a:cs typeface="Pretendard"/>
-              </a:rPr>
-              <a:t>DataFrame</a:t>
-            </a:r>
-          </a:p>
-        </p:txBody>
-      </p:sp>
-      <p:sp>
-        <p:nvSpPr>
           <p:cNvPr id="26" name="Rectangle 25"/>
           <p:cNvSpPr/>
           <p:nvPr/>
         </p:nvSpPr>
         <p:spPr>
           <a:xfrm>
-            <a:off x="1143000" y="7581900"/>
-            <a:ext cx="38100" cy="323850"/>
-          </a:xfrm>
-          <a:prstGeom prst="rect">
-            <a:avLst/>
-          </a:prstGeom>
-          <a:solidFill>
-            <a:srgbClr val="BFD3F5"/>
+            <a:off x="10020300" y="4838700"/>
+            <a:ext cx="672167" cy="485775"/>
+          </a:xfrm>
+          <a:prstGeom prst="rect">
+            <a:avLst/>
+          </a:prstGeom>
+          <a:solidFill>
+            <a:srgbClr val="0D2B5E"/>
           </a:solidFill>
           <a:ln>
             <a:noFill/>
@@ -8586,8 +8555,440 @@
         </p:nvSpPr>
         <p:spPr>
           <a:xfrm>
-            <a:off x="1314450" y="7581900"/>
-            <a:ext cx="15830550" cy="342900"/>
+            <a:off x="10020300" y="4838700"/>
+            <a:ext cx="672167" cy="485775"/>
+          </a:xfrm>
+          <a:prstGeom prst="rect">
+            <a:avLst/>
+          </a:prstGeom>
+          <a:noFill/>
+        </p:spPr>
+        <p:txBody>
+          <a:bodyPr wrap="square" lIns="0" rIns="0" tIns="0" bIns="0" anchor="ctr">
+            <a:spAutoFit/>
+          </a:bodyPr>
+          <a:lstStyle/>
+          <a:p>
+            <a:pPr algn="ctr">
+              <a:lnSpc>
+                <a:spcPct val="100000"/>
+              </a:lnSpc>
+            </a:pPr>
+            <a:r>
+              <a:rPr sz="1500" b="1">
+                <a:solidFill>
+                  <a:srgbClr val="FFFFFF"/>
+                </a:solidFill>
+                <a:latin typeface="Pretendard"/>
+                <a:ea typeface="Pretendard"/>
+                <a:cs typeface="Pretendard"/>
+              </a:rPr>
+              <a:t>경계</a:t>
+            </a:r>
+          </a:p>
+        </p:txBody>
+      </p:sp>
+      <p:sp>
+        <p:nvSpPr>
+          <p:cNvPr id="28" name="Rectangle 27"/>
+          <p:cNvSpPr/>
+          <p:nvPr/>
+        </p:nvSpPr>
+        <p:spPr>
+          <a:xfrm>
+            <a:off x="10692467" y="4838700"/>
+            <a:ext cx="6204883" cy="485775"/>
+          </a:xfrm>
+          <a:prstGeom prst="rect">
+            <a:avLst/>
+          </a:prstGeom>
+          <a:solidFill>
+            <a:srgbClr val="FAFBFD"/>
+          </a:solidFill>
+          <a:ln w="9525">
+            <a:solidFill>
+              <a:srgbClr val="DCE1E8"/>
+            </a:solidFill>
+          </a:ln>
+          <a:effectLst/>
+        </p:spPr>
+        <p:txBody>
+          <a:bodyPr rtlCol="0" anchor="ctr" wrap="square"/>
+          <a:lstStyle/>
+          <a:p>
+            <a:pPr algn="ctr"/>
+          </a:p>
+        </p:txBody>
+      </p:sp>
+      <p:sp>
+        <p:nvSpPr>
+          <p:cNvPr id="29" name="TextBox 28"/>
+          <p:cNvSpPr txBox="1"/>
+          <p:nvPr/>
+        </p:nvSpPr>
+        <p:spPr>
+          <a:xfrm>
+            <a:off x="10844867" y="4838700"/>
+            <a:ext cx="5900083" cy="485775"/>
+          </a:xfrm>
+          <a:prstGeom prst="rect">
+            <a:avLst/>
+          </a:prstGeom>
+          <a:noFill/>
+        </p:spPr>
+        <p:txBody>
+          <a:bodyPr wrap="square" lIns="0" rIns="0" tIns="0" bIns="0" anchor="ctr">
+            <a:spAutoFit/>
+          </a:bodyPr>
+          <a:lstStyle/>
+          <a:p>
+            <a:pPr algn="l">
+              <a:lnSpc>
+                <a:spcPct val="115000"/>
+              </a:lnSpc>
+            </a:pPr>
+            <a:r>
+              <a:rPr sz="1500" b="0">
+                <a:solidFill>
+                  <a:srgbClr val="3D3D3D"/>
+                </a:solidFill>
+                <a:latin typeface="Pretendard"/>
+                <a:ea typeface="Pretendard"/>
+                <a:cs typeface="Pretendard"/>
+              </a:rPr>
+              <a:t>[30200, 32800]</a:t>
+            </a:r>
+          </a:p>
+        </p:txBody>
+      </p:sp>
+      <p:sp>
+        <p:nvSpPr>
+          <p:cNvPr id="30" name="Rectangle 29"/>
+          <p:cNvSpPr/>
+          <p:nvPr/>
+        </p:nvSpPr>
+        <p:spPr>
+          <a:xfrm>
+            <a:off x="10020300" y="5400675"/>
+            <a:ext cx="672167" cy="485775"/>
+          </a:xfrm>
+          <a:prstGeom prst="rect">
+            <a:avLst/>
+          </a:prstGeom>
+          <a:solidFill>
+            <a:srgbClr val="0D2B5E"/>
+          </a:solidFill>
+          <a:ln>
+            <a:noFill/>
+          </a:ln>
+          <a:effectLst/>
+        </p:spPr>
+        <p:txBody>
+          <a:bodyPr rtlCol="0" anchor="ctr" wrap="square"/>
+          <a:lstStyle/>
+          <a:p>
+            <a:pPr algn="ctr"/>
+          </a:p>
+        </p:txBody>
+      </p:sp>
+      <p:sp>
+        <p:nvSpPr>
+          <p:cNvPr id="31" name="TextBox 30"/>
+          <p:cNvSpPr txBox="1"/>
+          <p:nvPr/>
+        </p:nvSpPr>
+        <p:spPr>
+          <a:xfrm>
+            <a:off x="10020300" y="5400675"/>
+            <a:ext cx="672167" cy="485775"/>
+          </a:xfrm>
+          <a:prstGeom prst="rect">
+            <a:avLst/>
+          </a:prstGeom>
+          <a:noFill/>
+        </p:spPr>
+        <p:txBody>
+          <a:bodyPr wrap="square" lIns="0" rIns="0" tIns="0" bIns="0" anchor="ctr">
+            <a:spAutoFit/>
+          </a:bodyPr>
+          <a:lstStyle/>
+          <a:p>
+            <a:pPr algn="ctr">
+              <a:lnSpc>
+                <a:spcPct val="100000"/>
+              </a:lnSpc>
+            </a:pPr>
+            <a:r>
+              <a:rPr sz="1500" b="1">
+                <a:solidFill>
+                  <a:srgbClr val="FFFFFF"/>
+                </a:solidFill>
+                <a:latin typeface="Pretendard"/>
+                <a:ea typeface="Pretendard"/>
+                <a:cs typeface="Pretendard"/>
+              </a:rPr>
+              <a:t>결과</a:t>
+            </a:r>
+          </a:p>
+        </p:txBody>
+      </p:sp>
+      <p:sp>
+        <p:nvSpPr>
+          <p:cNvPr id="32" name="Rectangle 31"/>
+          <p:cNvSpPr/>
+          <p:nvPr/>
+        </p:nvSpPr>
+        <p:spPr>
+          <a:xfrm>
+            <a:off x="10692467" y="5400675"/>
+            <a:ext cx="6204883" cy="485775"/>
+          </a:xfrm>
+          <a:prstGeom prst="rect">
+            <a:avLst/>
+          </a:prstGeom>
+          <a:solidFill>
+            <a:srgbClr val="FAFBFD"/>
+          </a:solidFill>
+          <a:ln w="9525">
+            <a:solidFill>
+              <a:srgbClr val="DCE1E8"/>
+            </a:solidFill>
+          </a:ln>
+          <a:effectLst/>
+        </p:spPr>
+        <p:txBody>
+          <a:bodyPr rtlCol="0" anchor="ctr" wrap="square"/>
+          <a:lstStyle/>
+          <a:p>
+            <a:pPr algn="ctr"/>
+          </a:p>
+        </p:txBody>
+      </p:sp>
+      <p:sp>
+        <p:nvSpPr>
+          <p:cNvPr id="33" name="TextBox 32"/>
+          <p:cNvSpPr txBox="1"/>
+          <p:nvPr/>
+        </p:nvSpPr>
+        <p:spPr>
+          <a:xfrm>
+            <a:off x="10844867" y="5400675"/>
+            <a:ext cx="5900083" cy="485775"/>
+          </a:xfrm>
+          <a:prstGeom prst="rect">
+            <a:avLst/>
+          </a:prstGeom>
+          <a:noFill/>
+        </p:spPr>
+        <p:txBody>
+          <a:bodyPr wrap="square" lIns="0" rIns="0" tIns="0" bIns="0" anchor="ctr">
+            <a:spAutoFit/>
+          </a:bodyPr>
+          <a:lstStyle/>
+          <a:p>
+            <a:pPr algn="l">
+              <a:lnSpc>
+                <a:spcPct val="115000"/>
+              </a:lnSpc>
+            </a:pPr>
+            <a:r>
+              <a:rPr sz="1500" b="0">
+                <a:solidFill>
+                  <a:srgbClr val="3D3D3D"/>
+                </a:solidFill>
+                <a:latin typeface="Pretendard"/>
+                <a:ea typeface="Pretendard"/>
+                <a:cs typeface="Pretendard"/>
+              </a:rPr>
+              <a:t>B 34 · A 34 · S 32</a:t>
+            </a:r>
+          </a:p>
+        </p:txBody>
+      </p:sp>
+      <p:sp>
+        <p:nvSpPr>
+          <p:cNvPr id="34" name="Rectangle 33"/>
+          <p:cNvSpPr/>
+          <p:nvPr/>
+        </p:nvSpPr>
+        <p:spPr>
+          <a:xfrm>
+            <a:off x="10020300" y="5962650"/>
+            <a:ext cx="672167" cy="485775"/>
+          </a:xfrm>
+          <a:prstGeom prst="rect">
+            <a:avLst/>
+          </a:prstGeom>
+          <a:solidFill>
+            <a:srgbClr val="0D2B5E"/>
+          </a:solidFill>
+          <a:ln>
+            <a:noFill/>
+          </a:ln>
+          <a:effectLst/>
+        </p:spPr>
+        <p:txBody>
+          <a:bodyPr rtlCol="0" anchor="ctr" wrap="square"/>
+          <a:lstStyle/>
+          <a:p>
+            <a:pPr algn="ctr"/>
+          </a:p>
+        </p:txBody>
+      </p:sp>
+      <p:sp>
+        <p:nvSpPr>
+          <p:cNvPr id="35" name="TextBox 34"/>
+          <p:cNvSpPr txBox="1"/>
+          <p:nvPr/>
+        </p:nvSpPr>
+        <p:spPr>
+          <a:xfrm>
+            <a:off x="10020300" y="5962650"/>
+            <a:ext cx="672167" cy="485775"/>
+          </a:xfrm>
+          <a:prstGeom prst="rect">
+            <a:avLst/>
+          </a:prstGeom>
+          <a:noFill/>
+        </p:spPr>
+        <p:txBody>
+          <a:bodyPr wrap="square" lIns="0" rIns="0" tIns="0" bIns="0" anchor="ctr">
+            <a:spAutoFit/>
+          </a:bodyPr>
+          <a:lstStyle/>
+          <a:p>
+            <a:pPr algn="ctr">
+              <a:lnSpc>
+                <a:spcPct val="100000"/>
+              </a:lnSpc>
+            </a:pPr>
+            <a:r>
+              <a:rPr sz="1500" b="1">
+                <a:solidFill>
+                  <a:srgbClr val="FFFFFF"/>
+                </a:solidFill>
+                <a:latin typeface="Pretendard"/>
+                <a:ea typeface="Pretendard"/>
+                <a:cs typeface="Pretendard"/>
+              </a:rPr>
+              <a:t>이후</a:t>
+            </a:r>
+          </a:p>
+        </p:txBody>
+      </p:sp>
+      <p:sp>
+        <p:nvSpPr>
+          <p:cNvPr id="36" name="Rectangle 35"/>
+          <p:cNvSpPr/>
+          <p:nvPr/>
+        </p:nvSpPr>
+        <p:spPr>
+          <a:xfrm>
+            <a:off x="10692467" y="5962650"/>
+            <a:ext cx="6204883" cy="485775"/>
+          </a:xfrm>
+          <a:prstGeom prst="rect">
+            <a:avLst/>
+          </a:prstGeom>
+          <a:solidFill>
+            <a:srgbClr val="FAFBFD"/>
+          </a:solidFill>
+          <a:ln w="9525">
+            <a:solidFill>
+              <a:srgbClr val="DCE1E8"/>
+            </a:solidFill>
+          </a:ln>
+          <a:effectLst/>
+        </p:spPr>
+        <p:txBody>
+          <a:bodyPr rtlCol="0" anchor="ctr" wrap="square"/>
+          <a:lstStyle/>
+          <a:p>
+            <a:pPr algn="ctr"/>
+          </a:p>
+        </p:txBody>
+      </p:sp>
+      <p:sp>
+        <p:nvSpPr>
+          <p:cNvPr id="37" name="TextBox 36"/>
+          <p:cNvSpPr txBox="1"/>
+          <p:nvPr/>
+        </p:nvSpPr>
+        <p:spPr>
+          <a:xfrm>
+            <a:off x="10844867" y="5962650"/>
+            <a:ext cx="5900083" cy="485775"/>
+          </a:xfrm>
+          <a:prstGeom prst="rect">
+            <a:avLst/>
+          </a:prstGeom>
+          <a:noFill/>
+        </p:spPr>
+        <p:txBody>
+          <a:bodyPr wrap="square" lIns="0" rIns="0" tIns="0" bIns="0" anchor="ctr">
+            <a:spAutoFit/>
+          </a:bodyPr>
+          <a:lstStyle/>
+          <a:p>
+            <a:pPr algn="l">
+              <a:lnSpc>
+                <a:spcPct val="115000"/>
+              </a:lnSpc>
+            </a:pPr>
+            <a:r>
+              <a:rPr sz="1500" b="0">
+                <a:solidFill>
+                  <a:srgbClr val="3D3D3D"/>
+                </a:solidFill>
+                <a:latin typeface="Pretendard"/>
+                <a:ea typeface="Pretendard"/>
+                <a:cs typeface="Pretendard"/>
+              </a:rPr>
+              <a:t>2단계부터 grade2 를 쓴다</a:t>
+            </a:r>
+          </a:p>
+        </p:txBody>
+      </p:sp>
+      <p:sp>
+        <p:nvSpPr>
+          <p:cNvPr id="38" name="Oval 37"/>
+          <p:cNvSpPr/>
+          <p:nvPr/>
+        </p:nvSpPr>
+        <p:spPr>
+          <a:xfrm>
+            <a:off x="8686800" y="3771900"/>
+            <a:ext cx="914400" cy="914400"/>
+          </a:xfrm>
+          <a:prstGeom prst="ellipse">
+            <a:avLst/>
+          </a:prstGeom>
+          <a:solidFill>
+            <a:srgbClr val="0D2B5E"/>
+          </a:solidFill>
+          <a:ln>
+            <a:noFill/>
+          </a:ln>
+          <a:effectLst/>
+        </p:spPr>
+        <p:txBody>
+          <a:bodyPr rtlCol="0" anchor="ctr" wrap="square"/>
+          <a:lstStyle/>
+          <a:p>
+            <a:pPr algn="ctr"/>
+          </a:p>
+        </p:txBody>
+      </p:sp>
+      <p:sp>
+        <p:nvSpPr>
+          <p:cNvPr id="39" name="TextBox 38"/>
+          <p:cNvSpPr txBox="1"/>
+          <p:nvPr/>
+        </p:nvSpPr>
+        <p:spPr>
+          <a:xfrm>
+            <a:off x="8686800" y="4057650"/>
+            <a:ext cx="914400" cy="381000"/>
           </a:xfrm>
           <a:prstGeom prst="rect">
             <a:avLst/>
@@ -8600,28 +9001,28 @@
           </a:bodyPr>
           <a:lstStyle/>
           <a:p>
-            <a:pPr algn="l">
+            <a:pPr algn="ctr">
               <a:lnSpc>
                 <a:spcPct val="100000"/>
               </a:lnSpc>
             </a:pPr>
             <a:r>
-              <a:rPr sz="1725" b="1">
-                <a:solidFill>
-                  <a:srgbClr val="7D7D7D"/>
-                </a:solidFill>
-                <a:latin typeface="Pretendard"/>
-                <a:ea typeface="Pretendard"/>
-                <a:cs typeface="Pretendard"/>
-              </a:rPr>
-              <a:t>손으로 정한 경계는 치우치기 쉽다 — 실측 분포에 맞춰 조정해도 된다</a:t>
-            </a:r>
-          </a:p>
-        </p:txBody>
-      </p:sp>
-      <p:sp>
-        <p:nvSpPr>
-          <p:cNvPr id="28" name="Rectangle 27"/>
+              <a:rPr sz="2250" b="1">
+                <a:solidFill>
+                  <a:srgbClr val="FFFFFF"/>
+                </a:solidFill>
+                <a:latin typeface="Pretendard"/>
+                <a:ea typeface="Pretendard"/>
+                <a:cs typeface="Pretendard"/>
+              </a:rPr>
+              <a:t>VS</a:t>
+            </a:r>
+          </a:p>
+        </p:txBody>
+      </p:sp>
+      <p:sp>
+        <p:nvSpPr>
+          <p:cNvPr id="40" name="Rectangle 39"/>
           <p:cNvSpPr/>
           <p:nvPr/>
         </p:nvSpPr>
@@ -8651,7 +9052,7 @@
       </p:sp>
       <p:sp>
         <p:nvSpPr>
-          <p:cNvPr id="29" name="TextBox 28"/>
+          <p:cNvPr id="41" name="TextBox 40"/>
           <p:cNvSpPr txBox="1"/>
           <p:nvPr/>
         </p:nvSpPr>
@@ -8692,7 +9093,7 @@
       </p:sp>
       <p:sp>
         <p:nvSpPr>
-          <p:cNvPr id="30" name="TextBox 29"/>
+          <p:cNvPr id="42" name="TextBox 41"/>
           <p:cNvSpPr txBox="1"/>
           <p:nvPr/>
         </p:nvSpPr>
@@ -8751,7 +9152,7 @@
       <p:grpSpPr/>
       <p:sp>
         <p:nvSpPr>
-          <p:cNvPr id="2" name="Oval 1"/>
+          <p:cNvPr id="2" name="deckgen:decor"/>
           <p:cNvSpPr/>
           <p:nvPr/>
         </p:nvSpPr>
@@ -8781,7 +9182,7 @@
       </p:sp>
       <p:sp>
         <p:nvSpPr>
-          <p:cNvPr id="3" name="Oval 2"/>
+          <p:cNvPr id="3" name="deckgen:decor"/>
           <p:cNvSpPr/>
           <p:nvPr/>
         </p:nvSpPr>
@@ -8811,7 +9212,7 @@
       </p:sp>
       <p:sp>
         <p:nvSpPr>
-          <p:cNvPr id="4" name="Oval 3"/>
+          <p:cNvPr id="4" name="deckgen:decor"/>
           <p:cNvSpPr/>
           <p:nvPr/>
         </p:nvSpPr>
@@ -8953,100 +9354,18 @@
       </p:sp>
       <p:sp>
         <p:nvSpPr>
-          <p:cNvPr id="8" name="TextBox 7"/>
-          <p:cNvSpPr txBox="1"/>
-          <p:nvPr/>
-        </p:nvSpPr>
-        <p:spPr>
-          <a:xfrm>
-            <a:off x="1143000" y="2857500"/>
-            <a:ext cx="7372350" cy="533400"/>
-          </a:xfrm>
-          <a:prstGeom prst="rect">
-            <a:avLst/>
-          </a:prstGeom>
-          <a:noFill/>
-        </p:spPr>
-        <p:txBody>
-          <a:bodyPr wrap="square" lIns="0" rIns="0" tIns="0" bIns="0" anchor="t">
-            <a:spAutoFit/>
-          </a:bodyPr>
-          <a:lstStyle/>
-          <a:p>
-            <a:pPr algn="l">
-              <a:lnSpc>
-                <a:spcPct val="110000"/>
-              </a:lnSpc>
-            </a:pPr>
-            <a:r>
-              <a:rPr sz="3150" b="1">
-                <a:solidFill>
-                  <a:srgbClr val="0D2B5E"/>
-                </a:solidFill>
-                <a:latin typeface="Pretendard"/>
-                <a:ea typeface="Pretendard"/>
-                <a:cs typeface="Pretendard"/>
-              </a:rPr>
-              <a:t>SQL → DataFrame</a:t>
-            </a:r>
-          </a:p>
-        </p:txBody>
-      </p:sp>
-      <p:sp>
-        <p:nvSpPr>
-          <p:cNvPr id="9" name="TextBox 8"/>
-          <p:cNvSpPr txBox="1"/>
-          <p:nvPr/>
-        </p:nvSpPr>
-        <p:spPr>
-          <a:xfrm>
-            <a:off x="1143000" y="3467100"/>
-            <a:ext cx="7372350" cy="876300"/>
-          </a:xfrm>
-          <a:prstGeom prst="rect">
-            <a:avLst/>
-          </a:prstGeom>
-          <a:noFill/>
-        </p:spPr>
-        <p:txBody>
-          <a:bodyPr wrap="square" lIns="0" rIns="0" tIns="0" bIns="0" anchor="t">
-            <a:spAutoFit/>
-          </a:bodyPr>
-          <a:lstStyle/>
-          <a:p>
-            <a:pPr algn="l">
-              <a:lnSpc>
-                <a:spcPct val="146000"/>
-              </a:lnSpc>
-            </a:pPr>
-            <a:r>
-              <a:rPr sz="2250" b="0">
-                <a:solidFill>
-                  <a:srgbClr val="3D3D3D"/>
-                </a:solidFill>
-                <a:latin typeface="Pretendard"/>
-                <a:ea typeface="Pretendard"/>
-                <a:cs typeface="Pretendard"/>
-              </a:rPr>
-              <a:t>.df() — 결과를 Pandas 로 받는다</a:t>
-            </a:r>
-          </a:p>
-        </p:txBody>
-      </p:sp>
-      <p:sp>
-        <p:nvSpPr>
-          <p:cNvPr id="10" name="Rounded Rectangle 9"/>
-          <p:cNvSpPr/>
-          <p:nvPr/>
-        </p:nvSpPr>
-        <p:spPr>
-          <a:xfrm>
-            <a:off x="1143000" y="4610100"/>
-            <a:ext cx="7372350" cy="2857500"/>
+          <p:cNvPr id="8" name="Rounded Rectangle 7"/>
+          <p:cNvSpPr/>
+          <p:nvPr/>
+        </p:nvSpPr>
+        <p:spPr>
+          <a:xfrm>
+            <a:off x="1143000" y="2933700"/>
+            <a:ext cx="11430000" cy="1095375"/>
           </a:xfrm>
           <a:prstGeom prst="roundRect">
             <a:avLst>
-              <a:gd name="adj" fmla="val 1666"/>
+              <a:gd name="adj" fmla="val 4347"/>
             </a:avLst>
           </a:prstGeom>
           <a:solidFill>
@@ -9069,16 +9388,16 @@
       </p:sp>
       <p:sp>
         <p:nvSpPr>
-          <p:cNvPr id="11" name="Rectangle 10"/>
-          <p:cNvSpPr/>
-          <p:nvPr/>
-        </p:nvSpPr>
-        <p:spPr>
-          <a:xfrm>
-            <a:off x="1390650" y="4838700"/>
-            <a:ext cx="672167" cy="485775"/>
-          </a:xfrm>
-          <a:prstGeom prst="rect">
+          <p:cNvPr id="9" name="Oval 8"/>
+          <p:cNvSpPr/>
+          <p:nvPr/>
+        </p:nvSpPr>
+        <p:spPr>
+          <a:xfrm>
+            <a:off x="1447800" y="3181350"/>
+            <a:ext cx="590550" cy="590550"/>
+          </a:xfrm>
+          <a:prstGeom prst="ellipse">
             <a:avLst/>
           </a:prstGeom>
           <a:solidFill>
@@ -9099,58 +9418,142 @@
       </p:sp>
       <p:sp>
         <p:nvSpPr>
+          <p:cNvPr id="10" name="TextBox 9"/>
+          <p:cNvSpPr txBox="1"/>
+          <p:nvPr/>
+        </p:nvSpPr>
+        <p:spPr>
+          <a:xfrm>
+            <a:off x="1447800" y="3333750"/>
+            <a:ext cx="590550" cy="323850"/>
+          </a:xfrm>
+          <a:prstGeom prst="rect">
+            <a:avLst/>
+          </a:prstGeom>
+          <a:noFill/>
+        </p:spPr>
+        <p:txBody>
+          <a:bodyPr wrap="square" lIns="0" rIns="0" tIns="0" bIns="0" anchor="t">
+            <a:spAutoFit/>
+          </a:bodyPr>
+          <a:lstStyle/>
+          <a:p>
+            <a:pPr algn="ctr">
+              <a:lnSpc>
+                <a:spcPct val="100000"/>
+              </a:lnSpc>
+            </a:pPr>
+            <a:r>
+              <a:rPr sz="2250" b="1">
+                <a:solidFill>
+                  <a:srgbClr val="FFFFFF"/>
+                </a:solidFill>
+                <a:latin typeface="Pretendard"/>
+                <a:ea typeface="Pretendard"/>
+                <a:cs typeface="Pretendard"/>
+              </a:rPr>
+              <a:t>1</a:t>
+            </a:r>
+          </a:p>
+        </p:txBody>
+      </p:sp>
+      <p:sp>
+        <p:nvSpPr>
+          <p:cNvPr id="11" name="TextBox 10"/>
+          <p:cNvSpPr txBox="1"/>
+          <p:nvPr/>
+        </p:nvSpPr>
+        <p:spPr>
+          <a:xfrm>
+            <a:off x="2324100" y="3143250"/>
+            <a:ext cx="9906000" cy="400050"/>
+          </a:xfrm>
+          <a:prstGeom prst="rect">
+            <a:avLst/>
+          </a:prstGeom>
+          <a:noFill/>
+        </p:spPr>
+        <p:txBody>
+          <a:bodyPr wrap="square" lIns="0" rIns="0" tIns="0" bIns="0" anchor="t">
+            <a:spAutoFit/>
+          </a:bodyPr>
+          <a:lstStyle/>
+          <a:p>
+            <a:pPr algn="l">
+              <a:lnSpc>
+                <a:spcPct val="110000"/>
+              </a:lnSpc>
+            </a:pPr>
+            <a:r>
+              <a:rPr sz="2475" b="1">
+                <a:solidFill>
+                  <a:srgbClr val="0D2B5E"/>
+                </a:solidFill>
+                <a:latin typeface="Pretendard"/>
+                <a:ea typeface="Pretendard"/>
+                <a:cs typeface="Pretendard"/>
+              </a:rPr>
+              <a:t>SELECT grade2 AS grade, count(*), avg(spend) FROM top</a:t>
+            </a:r>
+          </a:p>
+        </p:txBody>
+      </p:sp>
+      <p:sp>
+        <p:nvSpPr>
           <p:cNvPr id="12" name="TextBox 11"/>
           <p:cNvSpPr txBox="1"/>
           <p:nvPr/>
         </p:nvSpPr>
         <p:spPr>
           <a:xfrm>
-            <a:off x="1390650" y="4838700"/>
-            <a:ext cx="672167" cy="485775"/>
-          </a:xfrm>
-          <a:prstGeom prst="rect">
-            <a:avLst/>
-          </a:prstGeom>
-          <a:noFill/>
-        </p:spPr>
-        <p:txBody>
-          <a:bodyPr wrap="square" lIns="0" rIns="0" tIns="0" bIns="0" anchor="ctr">
-            <a:spAutoFit/>
-          </a:bodyPr>
-          <a:lstStyle/>
-          <a:p>
-            <a:pPr algn="ctr">
-              <a:lnSpc>
-                <a:spcPct val="100000"/>
-              </a:lnSpc>
-            </a:pPr>
-            <a:r>
-              <a:rPr sz="1500" b="1">
-                <a:solidFill>
-                  <a:srgbClr val="FFFFFF"/>
-                </a:solidFill>
-                <a:latin typeface="Pretendard"/>
-                <a:ea typeface="Pretendard"/>
-                <a:cs typeface="Pretendard"/>
-              </a:rPr>
-              <a:t>호출</a:t>
-            </a:r>
-          </a:p>
-        </p:txBody>
-      </p:sp>
-      <p:sp>
-        <p:nvSpPr>
-          <p:cNvPr id="13" name="Rectangle 12"/>
-          <p:cNvSpPr/>
-          <p:nvPr/>
-        </p:nvSpPr>
-        <p:spPr>
-          <a:xfrm>
-            <a:off x="2062817" y="4838700"/>
-            <a:ext cx="6204883" cy="485775"/>
-          </a:xfrm>
-          <a:prstGeom prst="rect">
-            <a:avLst/>
+            <a:off x="2324100" y="3543300"/>
+            <a:ext cx="9906000" cy="361950"/>
+          </a:xfrm>
+          <a:prstGeom prst="rect">
+            <a:avLst/>
+          </a:prstGeom>
+          <a:noFill/>
+        </p:spPr>
+        <p:txBody>
+          <a:bodyPr wrap="square" lIns="0" rIns="0" tIns="0" bIns="0" anchor="t">
+            <a:spAutoFit/>
+          </a:bodyPr>
+          <a:lstStyle/>
+          <a:p>
+            <a:pPr algn="l">
+              <a:lnSpc>
+                <a:spcPct val="120000"/>
+              </a:lnSpc>
+            </a:pPr>
+            <a:r>
+              <a:rPr sz="2025" b="0">
+                <a:solidFill>
+                  <a:srgbClr val="3D3D3D"/>
+                </a:solidFill>
+                <a:latin typeface="Pretendard"/>
+                <a:ea typeface="Pretendard"/>
+                <a:cs typeface="Pretendard"/>
+              </a:rPr>
+              <a:t>파이썬 변수 top 을 FROM 에 그대로 쓴다</a:t>
+            </a:r>
+          </a:p>
+        </p:txBody>
+      </p:sp>
+      <p:sp>
+        <p:nvSpPr>
+          <p:cNvPr id="13" name="Rounded Rectangle 12"/>
+          <p:cNvSpPr/>
+          <p:nvPr/>
+        </p:nvSpPr>
+        <p:spPr>
+          <a:xfrm>
+            <a:off x="1143000" y="4200525"/>
+            <a:ext cx="11430000" cy="1095375"/>
+          </a:xfrm>
+          <a:prstGeom prst="roundRect">
+            <a:avLst>
+              <a:gd name="adj" fmla="val 4347"/>
+            </a:avLst>
           </a:prstGeom>
           <a:solidFill>
             <a:srgbClr val="FAFBFD"/>
@@ -9172,57 +9575,16 @@
       </p:sp>
       <p:sp>
         <p:nvSpPr>
-          <p:cNvPr id="14" name="TextBox 13"/>
-          <p:cNvSpPr txBox="1"/>
-          <p:nvPr/>
-        </p:nvSpPr>
-        <p:spPr>
-          <a:xfrm>
-            <a:off x="2215217" y="4838700"/>
-            <a:ext cx="5900083" cy="485775"/>
-          </a:xfrm>
-          <a:prstGeom prst="rect">
-            <a:avLst/>
-          </a:prstGeom>
-          <a:noFill/>
-        </p:spPr>
-        <p:txBody>
-          <a:bodyPr wrap="square" lIns="0" rIns="0" tIns="0" bIns="0" anchor="ctr">
-            <a:spAutoFit/>
-          </a:bodyPr>
-          <a:lstStyle/>
-          <a:p>
-            <a:pPr algn="l">
-              <a:lnSpc>
-                <a:spcPct val="115000"/>
-              </a:lnSpc>
-            </a:pPr>
-            <a:r>
-              <a:rPr sz="1500" b="0">
-                <a:solidFill>
-                  <a:srgbClr val="3D3D3D"/>
-                </a:solidFill>
-                <a:latin typeface="Pretendard"/>
-                <a:ea typeface="Pretendard"/>
-                <a:cs typeface="Pretendard"/>
-              </a:rPr>
-              <a:t>duckdb.sql("…").df()</a:t>
-            </a:r>
-          </a:p>
-        </p:txBody>
-      </p:sp>
-      <p:sp>
-        <p:nvSpPr>
-          <p:cNvPr id="15" name="Rectangle 14"/>
-          <p:cNvSpPr/>
-          <p:nvPr/>
-        </p:nvSpPr>
-        <p:spPr>
-          <a:xfrm>
-            <a:off x="1390650" y="5400675"/>
-            <a:ext cx="672167" cy="485775"/>
-          </a:xfrm>
-          <a:prstGeom prst="rect">
+          <p:cNvPr id="14" name="Oval 13"/>
+          <p:cNvSpPr/>
+          <p:nvPr/>
+        </p:nvSpPr>
+        <p:spPr>
+          <a:xfrm>
+            <a:off x="1447800" y="4448175"/>
+            <a:ext cx="590550" cy="590550"/>
+          </a:xfrm>
+          <a:prstGeom prst="ellipse">
             <a:avLst/>
           </a:prstGeom>
           <a:solidFill>
@@ -9243,58 +9605,142 @@
       </p:sp>
       <p:sp>
         <p:nvSpPr>
+          <p:cNvPr id="15" name="TextBox 14"/>
+          <p:cNvSpPr txBox="1"/>
+          <p:nvPr/>
+        </p:nvSpPr>
+        <p:spPr>
+          <a:xfrm>
+            <a:off x="1447800" y="4600575"/>
+            <a:ext cx="590550" cy="323850"/>
+          </a:xfrm>
+          <a:prstGeom prst="rect">
+            <a:avLst/>
+          </a:prstGeom>
+          <a:noFill/>
+        </p:spPr>
+        <p:txBody>
+          <a:bodyPr wrap="square" lIns="0" rIns="0" tIns="0" bIns="0" anchor="t">
+            <a:spAutoFit/>
+          </a:bodyPr>
+          <a:lstStyle/>
+          <a:p>
+            <a:pPr algn="ctr">
+              <a:lnSpc>
+                <a:spcPct val="100000"/>
+              </a:lnSpc>
+            </a:pPr>
+            <a:r>
+              <a:rPr sz="2250" b="1">
+                <a:solidFill>
+                  <a:srgbClr val="FFFFFF"/>
+                </a:solidFill>
+                <a:latin typeface="Pretendard"/>
+                <a:ea typeface="Pretendard"/>
+                <a:cs typeface="Pretendard"/>
+              </a:rPr>
+              <a:t>2</a:t>
+            </a:r>
+          </a:p>
+        </p:txBody>
+      </p:sp>
+      <p:sp>
+        <p:nvSpPr>
           <p:cNvPr id="16" name="TextBox 15"/>
           <p:cNvSpPr txBox="1"/>
           <p:nvPr/>
         </p:nvSpPr>
         <p:spPr>
           <a:xfrm>
-            <a:off x="1390650" y="5400675"/>
-            <a:ext cx="672167" cy="485775"/>
-          </a:xfrm>
-          <a:prstGeom prst="rect">
-            <a:avLst/>
-          </a:prstGeom>
-          <a:noFill/>
-        </p:spPr>
-        <p:txBody>
-          <a:bodyPr wrap="square" lIns="0" rIns="0" tIns="0" bIns="0" anchor="ctr">
-            <a:spAutoFit/>
-          </a:bodyPr>
-          <a:lstStyle/>
-          <a:p>
-            <a:pPr algn="ctr">
-              <a:lnSpc>
-                <a:spcPct val="100000"/>
-              </a:lnSpc>
-            </a:pPr>
-            <a:r>
-              <a:rPr sz="1500" b="1">
-                <a:solidFill>
-                  <a:srgbClr val="FFFFFF"/>
-                </a:solidFill>
-                <a:latin typeface="Pretendard"/>
-                <a:ea typeface="Pretendard"/>
-                <a:cs typeface="Pretendard"/>
-              </a:rPr>
-              <a:t>뜻</a:t>
-            </a:r>
-          </a:p>
-        </p:txBody>
-      </p:sp>
-      <p:sp>
-        <p:nvSpPr>
-          <p:cNvPr id="17" name="Rectangle 16"/>
-          <p:cNvSpPr/>
-          <p:nvPr/>
-        </p:nvSpPr>
-        <p:spPr>
-          <a:xfrm>
-            <a:off x="2062817" y="5400675"/>
-            <a:ext cx="6204883" cy="485775"/>
-          </a:xfrm>
-          <a:prstGeom prst="rect">
-            <a:avLst/>
+            <a:off x="2324100" y="4410075"/>
+            <a:ext cx="9906000" cy="400050"/>
+          </a:xfrm>
+          <a:prstGeom prst="rect">
+            <a:avLst/>
+          </a:prstGeom>
+          <a:noFill/>
+        </p:spPr>
+        <p:txBody>
+          <a:bodyPr wrap="square" lIns="0" rIns="0" tIns="0" bIns="0" anchor="t">
+            <a:spAutoFit/>
+          </a:bodyPr>
+          <a:lstStyle/>
+          <a:p>
+            <a:pPr algn="l">
+              <a:lnSpc>
+                <a:spcPct val="110000"/>
+              </a:lnSpc>
+            </a:pPr>
+            <a:r>
+              <a:rPr sz="2475" b="1">
+                <a:solidFill>
+                  <a:srgbClr val="0D2B5E"/>
+                </a:solidFill>
+                <a:latin typeface="Pretendard"/>
+                <a:ea typeface="Pretendard"/>
+                <a:cs typeface="Pretendard"/>
+              </a:rPr>
+              <a:t>GROUP BY grade2 ORDER BY avg_spend DESC</a:t>
+            </a:r>
+          </a:p>
+        </p:txBody>
+      </p:sp>
+      <p:sp>
+        <p:nvSpPr>
+          <p:cNvPr id="17" name="TextBox 16"/>
+          <p:cNvSpPr txBox="1"/>
+          <p:nvPr/>
+        </p:nvSpPr>
+        <p:spPr>
+          <a:xfrm>
+            <a:off x="2324100" y="4810125"/>
+            <a:ext cx="9906000" cy="361950"/>
+          </a:xfrm>
+          <a:prstGeom prst="rect">
+            <a:avLst/>
+          </a:prstGeom>
+          <a:noFill/>
+        </p:spPr>
+        <p:txBody>
+          <a:bodyPr wrap="square" lIns="0" rIns="0" tIns="0" bIns="0" anchor="t">
+            <a:spAutoFit/>
+          </a:bodyPr>
+          <a:lstStyle/>
+          <a:p>
+            <a:pPr algn="l">
+              <a:lnSpc>
+                <a:spcPct val="120000"/>
+              </a:lnSpc>
+            </a:pPr>
+            <a:r>
+              <a:rPr sz="2025" b="0">
+                <a:solidFill>
+                  <a:srgbClr val="3D3D3D"/>
+                </a:solidFill>
+                <a:latin typeface="Pretendard"/>
+                <a:ea typeface="Pretendard"/>
+                <a:cs typeface="Pretendard"/>
+              </a:rPr>
+              <a:t>등급 3행 요약표가 DataFrame 으로 돌아온다</a:t>
+            </a:r>
+          </a:p>
+        </p:txBody>
+      </p:sp>
+      <p:sp>
+        <p:nvSpPr>
+          <p:cNvPr id="18" name="Rounded Rectangle 17"/>
+          <p:cNvSpPr/>
+          <p:nvPr/>
+        </p:nvSpPr>
+        <p:spPr>
+          <a:xfrm>
+            <a:off x="1143000" y="5467350"/>
+            <a:ext cx="11430000" cy="1095375"/>
+          </a:xfrm>
+          <a:prstGeom prst="roundRect">
+            <a:avLst>
+              <a:gd name="adj" fmla="val 4347"/>
+            </a:avLst>
           </a:prstGeom>
           <a:solidFill>
             <a:srgbClr val="FAFBFD"/>
@@ -9316,57 +9762,16 @@
       </p:sp>
       <p:sp>
         <p:nvSpPr>
-          <p:cNvPr id="18" name="TextBox 17"/>
-          <p:cNvSpPr txBox="1"/>
-          <p:nvPr/>
-        </p:nvSpPr>
-        <p:spPr>
-          <a:xfrm>
-            <a:off x="2215217" y="5400675"/>
-            <a:ext cx="5900083" cy="485775"/>
-          </a:xfrm>
-          <a:prstGeom prst="rect">
-            <a:avLst/>
-          </a:prstGeom>
-          <a:noFill/>
-        </p:spPr>
-        <p:txBody>
-          <a:bodyPr wrap="square" lIns="0" rIns="0" tIns="0" bIns="0" anchor="ctr">
-            <a:spAutoFit/>
-          </a:bodyPr>
-          <a:lstStyle/>
-          <a:p>
-            <a:pPr algn="l">
-              <a:lnSpc>
-                <a:spcPct val="115000"/>
-              </a:lnSpc>
-            </a:pPr>
-            <a:r>
-              <a:rPr sz="1500" b="0">
-                <a:solidFill>
-                  <a:srgbClr val="3D3D3D"/>
-                </a:solidFill>
-                <a:latin typeface="Pretendard"/>
-                <a:ea typeface="Pretendard"/>
-                <a:cs typeface="Pretendard"/>
-              </a:rPr>
-              <a:t>결과 전부를 메모리에</a:t>
-            </a:r>
-          </a:p>
-        </p:txBody>
-      </p:sp>
-      <p:sp>
-        <p:nvSpPr>
-          <p:cNvPr id="19" name="Rectangle 18"/>
-          <p:cNvSpPr/>
-          <p:nvPr/>
-        </p:nvSpPr>
-        <p:spPr>
-          <a:xfrm>
-            <a:off x="1390650" y="5962650"/>
-            <a:ext cx="672167" cy="485775"/>
-          </a:xfrm>
-          <a:prstGeom prst="rect">
+          <p:cNvPr id="19" name="Oval 18"/>
+          <p:cNvSpPr/>
+          <p:nvPr/>
+        </p:nvSpPr>
+        <p:spPr>
+          <a:xfrm>
+            <a:off x="1447800" y="5715000"/>
+            <a:ext cx="590550" cy="590550"/>
+          </a:xfrm>
+          <a:prstGeom prst="ellipse">
             <a:avLst/>
           </a:prstGeom>
           <a:solidFill>
@@ -9393,16 +9798,16 @@
         </p:nvSpPr>
         <p:spPr>
           <a:xfrm>
-            <a:off x="1390650" y="5962650"/>
-            <a:ext cx="672167" cy="485775"/>
-          </a:xfrm>
-          <a:prstGeom prst="rect">
-            <a:avLst/>
-          </a:prstGeom>
-          <a:noFill/>
-        </p:spPr>
-        <p:txBody>
-          <a:bodyPr wrap="square" lIns="0" rIns="0" tIns="0" bIns="0" anchor="ctr">
+            <a:off x="1447800" y="5867400"/>
+            <a:ext cx="590550" cy="323850"/>
+          </a:xfrm>
+          <a:prstGeom prst="rect">
+            <a:avLst/>
+          </a:prstGeom>
+          <a:noFill/>
+        </p:spPr>
+        <p:txBody>
+          <a:bodyPr wrap="square" lIns="0" rIns="0" tIns="0" bIns="0" anchor="t">
             <a:spAutoFit/>
           </a:bodyPr>
           <a:lstStyle/>
@@ -9413,7 +9818,7 @@
               </a:lnSpc>
             </a:pPr>
             <a:r>
-              <a:rPr sz="1500" b="1">
+              <a:rPr sz="2250" b="1">
                 <a:solidFill>
                   <a:srgbClr val="FFFFFF"/>
                 </a:solidFill>
@@ -9421,31 +9826,115 @@
                 <a:ea typeface="Pretendard"/>
                 <a:cs typeface="Pretendard"/>
               </a:rPr>
-              <a:t>규칙</a:t>
-            </a:r>
-          </a:p>
-        </p:txBody>
-      </p:sp>
-      <p:sp>
-        <p:nvSpPr>
-          <p:cNvPr id="21" name="Rectangle 20"/>
-          <p:cNvSpPr/>
-          <p:nvPr/>
-        </p:nvSpPr>
-        <p:spPr>
-          <a:xfrm>
-            <a:off x="2062817" y="5962650"/>
-            <a:ext cx="6204883" cy="485775"/>
-          </a:xfrm>
-          <a:prstGeom prst="rect">
-            <a:avLst/>
-          </a:prstGeom>
-          <a:solidFill>
-            <a:srgbClr val="FAFBFD"/>
+              <a:t>3</a:t>
+            </a:r>
+          </a:p>
+        </p:txBody>
+      </p:sp>
+      <p:sp>
+        <p:nvSpPr>
+          <p:cNvPr id="21" name="TextBox 20"/>
+          <p:cNvSpPr txBox="1"/>
+          <p:nvPr/>
+        </p:nvSpPr>
+        <p:spPr>
+          <a:xfrm>
+            <a:off x="2324100" y="5676900"/>
+            <a:ext cx="9906000" cy="400050"/>
+          </a:xfrm>
+          <a:prstGeom prst="rect">
+            <a:avLst/>
+          </a:prstGeom>
+          <a:noFill/>
+        </p:spPr>
+        <p:txBody>
+          <a:bodyPr wrap="square" lIns="0" rIns="0" tIns="0" bIns="0" anchor="t">
+            <a:spAutoFit/>
+          </a:bodyPr>
+          <a:lstStyle/>
+          <a:p>
+            <a:pPr algn="l">
+              <a:lnSpc>
+                <a:spcPct val="110000"/>
+              </a:lnSpc>
+            </a:pPr>
+            <a:r>
+              <a:rPr sz="2475" b="1">
+                <a:solidFill>
+                  <a:srgbClr val="0D2B5E"/>
+                </a:solidFill>
+                <a:latin typeface="Pretendard"/>
+                <a:ea typeface="Pretendard"/>
+                <a:cs typeface="Pretendard"/>
+              </a:rPr>
+              <a:t>S 32명 36343.75 · A 34명 31658.82 · B 34명 29476.47</a:t>
+            </a:r>
+          </a:p>
+        </p:txBody>
+      </p:sp>
+      <p:sp>
+        <p:nvSpPr>
+          <p:cNvPr id="22" name="TextBox 21"/>
+          <p:cNvSpPr txBox="1"/>
+          <p:nvPr/>
+        </p:nvSpPr>
+        <p:spPr>
+          <a:xfrm>
+            <a:off x="2324100" y="6076950"/>
+            <a:ext cx="9906000" cy="361950"/>
+          </a:xfrm>
+          <a:prstGeom prst="rect">
+            <a:avLst/>
+          </a:prstGeom>
+          <a:noFill/>
+        </p:spPr>
+        <p:txBody>
+          <a:bodyPr wrap="square" lIns="0" rIns="0" tIns="0" bIns="0" anchor="t">
+            <a:spAutoFit/>
+          </a:bodyPr>
+          <a:lstStyle/>
+          <a:p>
+            <a:pPr algn="l">
+              <a:lnSpc>
+                <a:spcPct val="120000"/>
+              </a:lnSpc>
+            </a:pPr>
+            <a:r>
+              <a:rPr sz="2025" b="0">
+                <a:solidFill>
+                  <a:srgbClr val="3D3D3D"/>
+                </a:solidFill>
+                <a:latin typeface="Pretendard"/>
+                <a:ea typeface="Pretendard"/>
+                <a:cs typeface="Pretendard"/>
+              </a:rPr>
+              <a:t>1단계의 grade 로 묶었다면 S 한 줄만 나왔을 것</a:t>
+            </a:r>
+          </a:p>
+        </p:txBody>
+      </p:sp>
+      <p:sp>
+        <p:nvSpPr>
+          <p:cNvPr id="23" name="Rounded Rectangle 22"/>
+          <p:cNvSpPr/>
+          <p:nvPr/>
+        </p:nvSpPr>
+        <p:spPr>
+          <a:xfrm>
+            <a:off x="13144500" y="2933700"/>
+            <a:ext cx="4000500" cy="3629025"/>
+          </a:xfrm>
+          <a:prstGeom prst="roundRect">
+            <a:avLst>
+              <a:gd name="adj" fmla="val 1312"/>
+            </a:avLst>
+          </a:prstGeom>
+          <a:solidFill>
+            <a:srgbClr val="EDF3FD"/>
           </a:solidFill>
           <a:ln w="9525">
             <a:solidFill>
-              <a:srgbClr val="DCE1E8"/>
+              <a:srgbClr val="BFD3F5"/>
             </a:solidFill>
           </a:ln>
           <a:effectLst/>
@@ -9460,55 +9949,55 @@
       </p:sp>
       <p:sp>
         <p:nvSpPr>
-          <p:cNvPr id="22" name="TextBox 21"/>
-          <p:cNvSpPr txBox="1"/>
-          <p:nvPr/>
-        </p:nvSpPr>
-        <p:spPr>
-          <a:xfrm>
-            <a:off x="2215217" y="5962650"/>
-            <a:ext cx="5900083" cy="485775"/>
-          </a:xfrm>
-          <a:prstGeom prst="rect">
-            <a:avLst/>
-          </a:prstGeom>
-          <a:noFill/>
-        </p:spPr>
-        <p:txBody>
-          <a:bodyPr wrap="square" lIns="0" rIns="0" tIns="0" bIns="0" anchor="ctr">
+          <p:cNvPr id="24" name="TextBox 23"/>
+          <p:cNvSpPr txBox="1"/>
+          <p:nvPr/>
+        </p:nvSpPr>
+        <p:spPr>
+          <a:xfrm>
+            <a:off x="13487400" y="3929062"/>
+            <a:ext cx="3314700" cy="304800"/>
+          </a:xfrm>
+          <a:prstGeom prst="rect">
+            <a:avLst/>
+          </a:prstGeom>
+          <a:noFill/>
+        </p:spPr>
+        <p:txBody>
+          <a:bodyPr wrap="square" lIns="0" rIns="0" tIns="0" bIns="0" anchor="t">
             <a:spAutoFit/>
           </a:bodyPr>
           <a:lstStyle/>
           <a:p>
             <a:pPr algn="l">
               <a:lnSpc>
-                <a:spcPct val="115000"/>
-              </a:lnSpc>
-            </a:pPr>
-            <a:r>
-              <a:rPr sz="1500" b="0">
-                <a:solidFill>
-                  <a:srgbClr val="3D3D3D"/>
-                </a:solidFill>
-                <a:latin typeface="Pretendard"/>
-                <a:ea typeface="Pretendard"/>
-                <a:cs typeface="Pretendard"/>
-              </a:rPr>
-              <a:t>줄인 다음에 부른다</a:t>
-            </a:r>
-          </a:p>
-        </p:txBody>
-      </p:sp>
-      <p:sp>
-        <p:nvSpPr>
-          <p:cNvPr id="23" name="TextBox 22"/>
-          <p:cNvSpPr txBox="1"/>
-          <p:nvPr/>
-        </p:nvSpPr>
-        <p:spPr>
-          <a:xfrm>
-            <a:off x="9772650" y="2857500"/>
-            <a:ext cx="7372350" cy="533400"/>
+                <a:spcPct val="100000"/>
+              </a:lnSpc>
+            </a:pPr>
+            <a:r>
+              <a:rPr sz="1800" b="1" spc="190">
+                <a:solidFill>
+                  <a:srgbClr val="1E5BC6"/>
+                </a:solidFill>
+                <a:latin typeface="Pretendard"/>
+                <a:ea typeface="Pretendard"/>
+                <a:cs typeface="Pretendard"/>
+              </a:rPr>
+              <a:t>완성</a:t>
+            </a:r>
+          </a:p>
+        </p:txBody>
+      </p:sp>
+      <p:sp>
+        <p:nvSpPr>
+          <p:cNvPr id="25" name="TextBox 24"/>
+          <p:cNvSpPr txBox="1"/>
+          <p:nvPr/>
+        </p:nvSpPr>
+        <p:spPr>
+          <a:xfrm>
+            <a:off x="13487400" y="4329112"/>
+            <a:ext cx="3314700" cy="1238250"/>
           </a:xfrm>
           <a:prstGeom prst="rect">
             <a:avLst/>
@@ -9523,11 +10012,11 @@
           <a:p>
             <a:pPr algn="l">
               <a:lnSpc>
-                <a:spcPct val="110000"/>
-              </a:lnSpc>
-            </a:pPr>
-            <a:r>
-              <a:rPr sz="3150" b="1">
+                <a:spcPct val="138000"/>
+              </a:lnSpc>
+            </a:pPr>
+            <a:r>
+              <a:rPr sz="2700" b="1">
                 <a:solidFill>
                   <a:srgbClr val="0D2B5E"/>
                 </a:solidFill>
@@ -9535,83 +10024,26 @@
                 <a:ea typeface="Pretendard"/>
                 <a:cs typeface="Pretendard"/>
               </a:rPr>
-              <a:t>DataFrame → SQL</a:t>
-            </a:r>
-          </a:p>
-        </p:txBody>
-      </p:sp>
-      <p:sp>
-        <p:nvSpPr>
-          <p:cNvPr id="24" name="TextBox 23"/>
-          <p:cNvSpPr txBox="1"/>
-          <p:nvPr/>
-        </p:nvSpPr>
-        <p:spPr>
-          <a:xfrm>
-            <a:off x="9772650" y="3467100"/>
-            <a:ext cx="7372350" cy="876300"/>
-          </a:xfrm>
-          <a:prstGeom prst="rect">
-            <a:avLst/>
-          </a:prstGeom>
-          <a:noFill/>
-        </p:spPr>
-        <p:txBody>
-          <a:bodyPr wrap="square" lIns="0" rIns="0" tIns="0" bIns="0" anchor="t">
-            <a:spAutoFit/>
-          </a:bodyPr>
-          <a:lstStyle/>
+              <a:t>DuckDB ↔</a:t>
+            </a:r>
+          </a:p>
           <a:p>
             <a:pPr algn="l">
               <a:lnSpc>
-                <a:spcPct val="146000"/>
-              </a:lnSpc>
-            </a:pPr>
-            <a:r>
-              <a:rPr sz="2250" b="0">
-                <a:solidFill>
-                  <a:srgbClr val="3D3D3D"/>
-                </a:solidFill>
-                <a:latin typeface="Pretendard"/>
-                <a:ea typeface="Pretendard"/>
-                <a:cs typeface="Pretendard"/>
-              </a:rPr>
-              <a:t>FROM top — 변수 이름을 그대로</a:t>
-            </a:r>
-          </a:p>
-        </p:txBody>
-      </p:sp>
-      <p:sp>
-        <p:nvSpPr>
-          <p:cNvPr id="25" name="Rounded Rectangle 24"/>
-          <p:cNvSpPr/>
-          <p:nvPr/>
-        </p:nvSpPr>
-        <p:spPr>
-          <a:xfrm>
-            <a:off x="9772650" y="4610100"/>
-            <a:ext cx="7372350" cy="2857500"/>
-          </a:xfrm>
-          <a:prstGeom prst="roundRect">
-            <a:avLst>
-              <a:gd name="adj" fmla="val 1666"/>
-            </a:avLst>
-          </a:prstGeom>
-          <a:solidFill>
-            <a:srgbClr val="FAFBFD"/>
-          </a:solidFill>
-          <a:ln w="9525">
-            <a:solidFill>
-              <a:srgbClr val="DCE1E8"/>
-            </a:solidFill>
-          </a:ln>
-          <a:effectLst/>
-        </p:spPr>
-        <p:txBody>
-          <a:bodyPr rtlCol="0" anchor="ctr" wrap="square"/>
-          <a:lstStyle/>
-          <a:p>
-            <a:pPr algn="ctr"/>
+                <a:spcPct val="138000"/>
+              </a:lnSpc>
+            </a:pPr>
+            <a:r>
+              <a:rPr sz="2700" b="1">
+                <a:solidFill>
+                  <a:srgbClr val="0D2B5E"/>
+                </a:solidFill>
+                <a:latin typeface="Pretendard"/>
+                <a:ea typeface="Pretendard"/>
+                <a:cs typeface="Pretendard"/>
+              </a:rPr>
+              <a:t>Pandas 왕복</a:t>
+            </a:r>
           </a:p>
         </p:txBody>
       </p:sp>
@@ -9623,14 +10055,14 @@
         </p:nvSpPr>
         <p:spPr>
           <a:xfrm>
-            <a:off x="10020300" y="4838700"/>
-            <a:ext cx="672167" cy="485775"/>
-          </a:xfrm>
-          <a:prstGeom prst="rect">
-            <a:avLst/>
-          </a:prstGeom>
-          <a:solidFill>
-            <a:srgbClr val="0D2B5E"/>
+            <a:off x="1143000" y="8058150"/>
+            <a:ext cx="16002000" cy="9525"/>
+          </a:xfrm>
+          <a:prstGeom prst="rect">
+            <a:avLst/>
+          </a:prstGeom>
+          <a:solidFill>
+            <a:srgbClr val="DCE1E8"/>
           </a:solidFill>
           <a:ln>
             <a:noFill/>
@@ -9653,509 +10085,6 @@
         </p:nvSpPr>
         <p:spPr>
           <a:xfrm>
-            <a:off x="10020300" y="4838700"/>
-            <a:ext cx="672167" cy="485775"/>
-          </a:xfrm>
-          <a:prstGeom prst="rect">
-            <a:avLst/>
-          </a:prstGeom>
-          <a:noFill/>
-        </p:spPr>
-        <p:txBody>
-          <a:bodyPr wrap="square" lIns="0" rIns="0" tIns="0" bIns="0" anchor="ctr">
-            <a:spAutoFit/>
-          </a:bodyPr>
-          <a:lstStyle/>
-          <a:p>
-            <a:pPr algn="ctr">
-              <a:lnSpc>
-                <a:spcPct val="100000"/>
-              </a:lnSpc>
-            </a:pPr>
-            <a:r>
-              <a:rPr sz="1500" b="1">
-                <a:solidFill>
-                  <a:srgbClr val="FFFFFF"/>
-                </a:solidFill>
-                <a:latin typeface="Pretendard"/>
-                <a:ea typeface="Pretendard"/>
-                <a:cs typeface="Pretendard"/>
-              </a:rPr>
-              <a:t>호출</a:t>
-            </a:r>
-          </a:p>
-        </p:txBody>
-      </p:sp>
-      <p:sp>
-        <p:nvSpPr>
-          <p:cNvPr id="28" name="Rectangle 27"/>
-          <p:cNvSpPr/>
-          <p:nvPr/>
-        </p:nvSpPr>
-        <p:spPr>
-          <a:xfrm>
-            <a:off x="10692467" y="4838700"/>
-            <a:ext cx="6204883" cy="485775"/>
-          </a:xfrm>
-          <a:prstGeom prst="rect">
-            <a:avLst/>
-          </a:prstGeom>
-          <a:solidFill>
-            <a:srgbClr val="FAFBFD"/>
-          </a:solidFill>
-          <a:ln w="9525">
-            <a:solidFill>
-              <a:srgbClr val="DCE1E8"/>
-            </a:solidFill>
-          </a:ln>
-          <a:effectLst/>
-        </p:spPr>
-        <p:txBody>
-          <a:bodyPr rtlCol="0" anchor="ctr" wrap="square"/>
-          <a:lstStyle/>
-          <a:p>
-            <a:pPr algn="ctr"/>
-          </a:p>
-        </p:txBody>
-      </p:sp>
-      <p:sp>
-        <p:nvSpPr>
-          <p:cNvPr id="29" name="TextBox 28"/>
-          <p:cNvSpPr txBox="1"/>
-          <p:nvPr/>
-        </p:nvSpPr>
-        <p:spPr>
-          <a:xfrm>
-            <a:off x="10844867" y="4838700"/>
-            <a:ext cx="5900083" cy="485775"/>
-          </a:xfrm>
-          <a:prstGeom prst="rect">
-            <a:avLst/>
-          </a:prstGeom>
-          <a:noFill/>
-        </p:spPr>
-        <p:txBody>
-          <a:bodyPr wrap="square" lIns="0" rIns="0" tIns="0" bIns="0" anchor="ctr">
-            <a:spAutoFit/>
-          </a:bodyPr>
-          <a:lstStyle/>
-          <a:p>
-            <a:pPr algn="l">
-              <a:lnSpc>
-                <a:spcPct val="115000"/>
-              </a:lnSpc>
-            </a:pPr>
-            <a:r>
-              <a:rPr sz="1500" b="0">
-                <a:solidFill>
-                  <a:srgbClr val="3D3D3D"/>
-                </a:solidFill>
-                <a:latin typeface="Pretendard"/>
-                <a:ea typeface="Pretendard"/>
-                <a:cs typeface="Pretendard"/>
-              </a:rPr>
-              <a:t>SELECT grade, count(*) … FROM top</a:t>
-            </a:r>
-          </a:p>
-        </p:txBody>
-      </p:sp>
-      <p:sp>
-        <p:nvSpPr>
-          <p:cNvPr id="30" name="Rectangle 29"/>
-          <p:cNvSpPr/>
-          <p:nvPr/>
-        </p:nvSpPr>
-        <p:spPr>
-          <a:xfrm>
-            <a:off x="10020300" y="5400675"/>
-            <a:ext cx="672167" cy="485775"/>
-          </a:xfrm>
-          <a:prstGeom prst="rect">
-            <a:avLst/>
-          </a:prstGeom>
-          <a:solidFill>
-            <a:srgbClr val="0D2B5E"/>
-          </a:solidFill>
-          <a:ln>
-            <a:noFill/>
-          </a:ln>
-          <a:effectLst/>
-        </p:spPr>
-        <p:txBody>
-          <a:bodyPr rtlCol="0" anchor="ctr" wrap="square"/>
-          <a:lstStyle/>
-          <a:p>
-            <a:pPr algn="ctr"/>
-          </a:p>
-        </p:txBody>
-      </p:sp>
-      <p:sp>
-        <p:nvSpPr>
-          <p:cNvPr id="31" name="TextBox 30"/>
-          <p:cNvSpPr txBox="1"/>
-          <p:nvPr/>
-        </p:nvSpPr>
-        <p:spPr>
-          <a:xfrm>
-            <a:off x="10020300" y="5400675"/>
-            <a:ext cx="672167" cy="485775"/>
-          </a:xfrm>
-          <a:prstGeom prst="rect">
-            <a:avLst/>
-          </a:prstGeom>
-          <a:noFill/>
-        </p:spPr>
-        <p:txBody>
-          <a:bodyPr wrap="square" lIns="0" rIns="0" tIns="0" bIns="0" anchor="ctr">
-            <a:spAutoFit/>
-          </a:bodyPr>
-          <a:lstStyle/>
-          <a:p>
-            <a:pPr algn="ctr">
-              <a:lnSpc>
-                <a:spcPct val="100000"/>
-              </a:lnSpc>
-            </a:pPr>
-            <a:r>
-              <a:rPr sz="1500" b="1">
-                <a:solidFill>
-                  <a:srgbClr val="FFFFFF"/>
-                </a:solidFill>
-                <a:latin typeface="Pretendard"/>
-                <a:ea typeface="Pretendard"/>
-                <a:cs typeface="Pretendard"/>
-              </a:rPr>
-              <a:t>묶기</a:t>
-            </a:r>
-          </a:p>
-        </p:txBody>
-      </p:sp>
-      <p:sp>
-        <p:nvSpPr>
-          <p:cNvPr id="32" name="Rectangle 31"/>
-          <p:cNvSpPr/>
-          <p:nvPr/>
-        </p:nvSpPr>
-        <p:spPr>
-          <a:xfrm>
-            <a:off x="10692467" y="5400675"/>
-            <a:ext cx="6204883" cy="485775"/>
-          </a:xfrm>
-          <a:prstGeom prst="rect">
-            <a:avLst/>
-          </a:prstGeom>
-          <a:solidFill>
-            <a:srgbClr val="FAFBFD"/>
-          </a:solidFill>
-          <a:ln w="9525">
-            <a:solidFill>
-              <a:srgbClr val="DCE1E8"/>
-            </a:solidFill>
-          </a:ln>
-          <a:effectLst/>
-        </p:spPr>
-        <p:txBody>
-          <a:bodyPr rtlCol="0" anchor="ctr" wrap="square"/>
-          <a:lstStyle/>
-          <a:p>
-            <a:pPr algn="ctr"/>
-          </a:p>
-        </p:txBody>
-      </p:sp>
-      <p:sp>
-        <p:nvSpPr>
-          <p:cNvPr id="33" name="TextBox 32"/>
-          <p:cNvSpPr txBox="1"/>
-          <p:nvPr/>
-        </p:nvSpPr>
-        <p:spPr>
-          <a:xfrm>
-            <a:off x="10844867" y="5400675"/>
-            <a:ext cx="5900083" cy="485775"/>
-          </a:xfrm>
-          <a:prstGeom prst="rect">
-            <a:avLst/>
-          </a:prstGeom>
-          <a:noFill/>
-        </p:spPr>
-        <p:txBody>
-          <a:bodyPr wrap="square" lIns="0" rIns="0" tIns="0" bIns="0" anchor="ctr">
-            <a:spAutoFit/>
-          </a:bodyPr>
-          <a:lstStyle/>
-          <a:p>
-            <a:pPr algn="l">
-              <a:lnSpc>
-                <a:spcPct val="115000"/>
-              </a:lnSpc>
-            </a:pPr>
-            <a:r>
-              <a:rPr sz="1500" b="0">
-                <a:solidFill>
-                  <a:srgbClr val="3D3D3D"/>
-                </a:solidFill>
-                <a:latin typeface="Pretendard"/>
-                <a:ea typeface="Pretendard"/>
-                <a:cs typeface="Pretendard"/>
-              </a:rPr>
-              <a:t>GROUP BY grade</a:t>
-            </a:r>
-          </a:p>
-        </p:txBody>
-      </p:sp>
-      <p:sp>
-        <p:nvSpPr>
-          <p:cNvPr id="34" name="Rectangle 33"/>
-          <p:cNvSpPr/>
-          <p:nvPr/>
-        </p:nvSpPr>
-        <p:spPr>
-          <a:xfrm>
-            <a:off x="10020300" y="5962650"/>
-            <a:ext cx="672167" cy="485775"/>
-          </a:xfrm>
-          <a:prstGeom prst="rect">
-            <a:avLst/>
-          </a:prstGeom>
-          <a:solidFill>
-            <a:srgbClr val="0D2B5E"/>
-          </a:solidFill>
-          <a:ln>
-            <a:noFill/>
-          </a:ln>
-          <a:effectLst/>
-        </p:spPr>
-        <p:txBody>
-          <a:bodyPr rtlCol="0" anchor="ctr" wrap="square"/>
-          <a:lstStyle/>
-          <a:p>
-            <a:pPr algn="ctr"/>
-          </a:p>
-        </p:txBody>
-      </p:sp>
-      <p:sp>
-        <p:nvSpPr>
-          <p:cNvPr id="35" name="TextBox 34"/>
-          <p:cNvSpPr txBox="1"/>
-          <p:nvPr/>
-        </p:nvSpPr>
-        <p:spPr>
-          <a:xfrm>
-            <a:off x="10020300" y="5962650"/>
-            <a:ext cx="672167" cy="485775"/>
-          </a:xfrm>
-          <a:prstGeom prst="rect">
-            <a:avLst/>
-          </a:prstGeom>
-          <a:noFill/>
-        </p:spPr>
-        <p:txBody>
-          <a:bodyPr wrap="square" lIns="0" rIns="0" tIns="0" bIns="0" anchor="ctr">
-            <a:spAutoFit/>
-          </a:bodyPr>
-          <a:lstStyle/>
-          <a:p>
-            <a:pPr algn="ctr">
-              <a:lnSpc>
-                <a:spcPct val="100000"/>
-              </a:lnSpc>
-            </a:pPr>
-            <a:r>
-              <a:rPr sz="1500" b="1">
-                <a:solidFill>
-                  <a:srgbClr val="FFFFFF"/>
-                </a:solidFill>
-                <a:latin typeface="Pretendard"/>
-                <a:ea typeface="Pretendard"/>
-                <a:cs typeface="Pretendard"/>
-              </a:rPr>
-              <a:t>확인</a:t>
-            </a:r>
-          </a:p>
-        </p:txBody>
-      </p:sp>
-      <p:sp>
-        <p:nvSpPr>
-          <p:cNvPr id="36" name="Rectangle 35"/>
-          <p:cNvSpPr/>
-          <p:nvPr/>
-        </p:nvSpPr>
-        <p:spPr>
-          <a:xfrm>
-            <a:off x="10692467" y="5962650"/>
-            <a:ext cx="6204883" cy="485775"/>
-          </a:xfrm>
-          <a:prstGeom prst="rect">
-            <a:avLst/>
-          </a:prstGeom>
-          <a:solidFill>
-            <a:srgbClr val="FAFBFD"/>
-          </a:solidFill>
-          <a:ln w="9525">
-            <a:solidFill>
-              <a:srgbClr val="DCE1E8"/>
-            </a:solidFill>
-          </a:ln>
-          <a:effectLst/>
-        </p:spPr>
-        <p:txBody>
-          <a:bodyPr rtlCol="0" anchor="ctr" wrap="square"/>
-          <a:lstStyle/>
-          <a:p>
-            <a:pPr algn="ctr"/>
-          </a:p>
-        </p:txBody>
-      </p:sp>
-      <p:sp>
-        <p:nvSpPr>
-          <p:cNvPr id="37" name="TextBox 36"/>
-          <p:cNvSpPr txBox="1"/>
-          <p:nvPr/>
-        </p:nvSpPr>
-        <p:spPr>
-          <a:xfrm>
-            <a:off x="10844867" y="5962650"/>
-            <a:ext cx="5900083" cy="485775"/>
-          </a:xfrm>
-          <a:prstGeom prst="rect">
-            <a:avLst/>
-          </a:prstGeom>
-          <a:noFill/>
-        </p:spPr>
-        <p:txBody>
-          <a:bodyPr wrap="square" lIns="0" rIns="0" tIns="0" bIns="0" anchor="ctr">
-            <a:spAutoFit/>
-          </a:bodyPr>
-          <a:lstStyle/>
-          <a:p>
-            <a:pPr algn="l">
-              <a:lnSpc>
-                <a:spcPct val="115000"/>
-              </a:lnSpc>
-            </a:pPr>
-            <a:r>
-              <a:rPr sz="1500" b="0">
-                <a:solidFill>
-                  <a:srgbClr val="3D3D3D"/>
-                </a:solidFill>
-                <a:latin typeface="Pretendard"/>
-                <a:ea typeface="Pretendard"/>
-                <a:cs typeface="Pretendard"/>
-              </a:rPr>
-              <a:t>등급 3행의 요약표</a:t>
-            </a:r>
-          </a:p>
-        </p:txBody>
-      </p:sp>
-      <p:sp>
-        <p:nvSpPr>
-          <p:cNvPr id="38" name="Oval 37"/>
-          <p:cNvSpPr/>
-          <p:nvPr/>
-        </p:nvSpPr>
-        <p:spPr>
-          <a:xfrm>
-            <a:off x="8686800" y="3771900"/>
-            <a:ext cx="914400" cy="914400"/>
-          </a:xfrm>
-          <a:prstGeom prst="ellipse">
-            <a:avLst/>
-          </a:prstGeom>
-          <a:solidFill>
-            <a:srgbClr val="0D2B5E"/>
-          </a:solidFill>
-          <a:ln>
-            <a:noFill/>
-          </a:ln>
-          <a:effectLst/>
-        </p:spPr>
-        <p:txBody>
-          <a:bodyPr rtlCol="0" anchor="ctr" wrap="square"/>
-          <a:lstStyle/>
-          <a:p>
-            <a:pPr algn="ctr"/>
-          </a:p>
-        </p:txBody>
-      </p:sp>
-      <p:sp>
-        <p:nvSpPr>
-          <p:cNvPr id="39" name="TextBox 38"/>
-          <p:cNvSpPr txBox="1"/>
-          <p:nvPr/>
-        </p:nvSpPr>
-        <p:spPr>
-          <a:xfrm>
-            <a:off x="8686800" y="4057650"/>
-            <a:ext cx="914400" cy="381000"/>
-          </a:xfrm>
-          <a:prstGeom prst="rect">
-            <a:avLst/>
-          </a:prstGeom>
-          <a:noFill/>
-        </p:spPr>
-        <p:txBody>
-          <a:bodyPr wrap="square" lIns="0" rIns="0" tIns="0" bIns="0" anchor="t">
-            <a:spAutoFit/>
-          </a:bodyPr>
-          <a:lstStyle/>
-          <a:p>
-            <a:pPr algn="ctr">
-              <a:lnSpc>
-                <a:spcPct val="100000"/>
-              </a:lnSpc>
-            </a:pPr>
-            <a:r>
-              <a:rPr sz="2250" b="1">
-                <a:solidFill>
-                  <a:srgbClr val="FFFFFF"/>
-                </a:solidFill>
-                <a:latin typeface="Pretendard"/>
-                <a:ea typeface="Pretendard"/>
-                <a:cs typeface="Pretendard"/>
-              </a:rPr>
-              <a:t>VS</a:t>
-            </a:r>
-          </a:p>
-        </p:txBody>
-      </p:sp>
-      <p:sp>
-        <p:nvSpPr>
-          <p:cNvPr id="40" name="Rectangle 39"/>
-          <p:cNvSpPr/>
-          <p:nvPr/>
-        </p:nvSpPr>
-        <p:spPr>
-          <a:xfrm>
-            <a:off x="1143000" y="8058150"/>
-            <a:ext cx="16002000" cy="9525"/>
-          </a:xfrm>
-          <a:prstGeom prst="rect">
-            <a:avLst/>
-          </a:prstGeom>
-          <a:solidFill>
-            <a:srgbClr val="DCE1E8"/>
-          </a:solidFill>
-          <a:ln>
-            <a:noFill/>
-          </a:ln>
-          <a:effectLst/>
-        </p:spPr>
-        <p:txBody>
-          <a:bodyPr rtlCol="0" anchor="ctr" wrap="square"/>
-          <a:lstStyle/>
-          <a:p>
-            <a:pPr algn="ctr"/>
-          </a:p>
-        </p:txBody>
-      </p:sp>
-      <p:sp>
-        <p:nvSpPr>
-          <p:cNvPr id="41" name="TextBox 40"/>
-          <p:cNvSpPr txBox="1"/>
-          <p:nvPr/>
-        </p:nvSpPr>
-        <p:spPr>
-          <a:xfrm>
             <a:off x="1143000" y="8248650"/>
             <a:ext cx="13335000" cy="323850"/>
           </a:xfrm>
@@ -10191,7 +10120,7 @@
       </p:sp>
       <p:sp>
         <p:nvSpPr>
-          <p:cNvPr id="42" name="TextBox 41"/>
+          <p:cNvPr id="28" name="TextBox 27"/>
           <p:cNvSpPr txBox="1"/>
           <p:nvPr/>
         </p:nvSpPr>
@@ -10250,7 +10179,7 @@
       <p:grpSpPr/>
       <p:sp>
         <p:nvSpPr>
-          <p:cNvPr id="2" name="Oval 1"/>
+          <p:cNvPr id="2" name="deckgen:decor"/>
           <p:cNvSpPr/>
           <p:nvPr/>
         </p:nvSpPr>
@@ -10280,7 +10209,7 @@
       </p:sp>
       <p:sp>
         <p:nvSpPr>
-          <p:cNvPr id="3" name="Oval 2"/>
+          <p:cNvPr id="3" name="deckgen:decor"/>
           <p:cNvSpPr/>
           <p:nvPr/>
         </p:nvSpPr>
@@ -10310,7 +10239,7 @@
       </p:sp>
       <p:sp>
         <p:nvSpPr>
-          <p:cNvPr id="4" name="Oval 3"/>
+          <p:cNvPr id="4" name="deckgen:decor"/>
           <p:cNvSpPr/>
           <p:nvPr/>
         </p:nvSpPr>
@@ -10609,7 +10538,7 @@
                 <a:ea typeface="Pretendard"/>
                 <a:cs typeface="Pretendard"/>
               </a:rPr>
-              <a:t>사용자별 요약</a:t>
+              <a:t>(50000, 5)</a:t>
             </a:r>
           </a:p>
         </p:txBody>
@@ -10785,7 +10714,7 @@
                 <a:ea typeface="Pretendard"/>
                 <a:cs typeface="Pretendard"/>
               </a:rPr>
-              <a:t>cvr 계산</a:t>
+              <a:t>cvr · segment</a:t>
             </a:r>
           </a:p>
           <a:p>
@@ -10803,7 +10732,7 @@
                 <a:ea typeface="Pretendard"/>
                 <a:cs typeface="Pretendard"/>
               </a:rPr>
-              <a:t>segment 라벨</a:t>
+              <a:t>(50000, 7)</a:t>
             </a:r>
           </a:p>
         </p:txBody>
@@ -10997,7 +10926,7 @@
                 <a:ea typeface="Pretendard"/>
                 <a:cs typeface="Pretendard"/>
               </a:rPr>
-              <a:t>세그먼트별 요약</a:t>
+              <a:t>세그먼트 3행</a:t>
             </a:r>
           </a:p>
         </p:txBody>
@@ -11173,7 +11102,7 @@
                 <a:ea typeface="Pretendard"/>
                 <a:cs typeface="Pretendard"/>
               </a:rPr>
-              <a:t>browser·normal</a:t>
+              <a:t>browser 18499</a:t>
             </a:r>
           </a:p>
           <a:p>
@@ -11191,7 +11120,7 @@
                 <a:ea typeface="Pretendard"/>
                 <a:cs typeface="Pretendard"/>
               </a:rPr>
-              <a:t>high_intent</a:t>
+              <a:t>normal 18015</a:t>
             </a:r>
           </a:p>
         </p:txBody>
@@ -11266,7 +11195,7 @@
                 <a:ea typeface="Pretendard"/>
                 <a:cs typeface="Pretendard"/>
               </a:rPr>
-              <a:t>count(*) FILTER (WHERE 조건) — 조건에 맞는 것만 센다 · 2-2 의 CASE WHEN 합계와 같은 일을 더 짧게</a:t>
+              <a:t>high_intent 13486 · count(*) FILTER (WHERE 조건) 은 SUM(CASE WHEN 조건 THEN 1 ELSE 0 END) 과 같은 일을 짧게</a:t>
             </a:r>
           </a:p>
         </p:txBody>
@@ -11307,7 +11236,7 @@
                 <a:ea typeface="Pretendard"/>
                 <a:cs typeface="Pretendard"/>
               </a:rPr>
-              <a:t>① 이 5만 행 안팎으로 줄고 ③ 에 세그먼트 3종이 나오면 성공 — 100만 행을 Pandas 로 직접 다루지 않았다</a:t>
+              <a:t>browser 의 avg_spend 0.0 — 구매가 없어 NaN 인 spend 를 coalesce 가 0 으로 바꾼 결과</a:t>
             </a:r>
           </a:p>
         </p:txBody>
@@ -11444,7 +11373,7 @@
       <p:grpSpPr/>
       <p:sp>
         <p:nvSpPr>
-          <p:cNvPr id="2" name="Oval 1"/>
+          <p:cNvPr id="2" name="deckgen:decor"/>
           <p:cNvSpPr/>
           <p:nvPr/>
         </p:nvSpPr>
@@ -11474,7 +11403,7 @@
       </p:sp>
       <p:sp>
         <p:nvSpPr>
-          <p:cNvPr id="3" name="Oval 2"/>
+          <p:cNvPr id="3" name="deckgen:decor"/>
           <p:cNvSpPr/>
           <p:nvPr/>
         </p:nvSpPr>
@@ -11504,7 +11433,7 @@
       </p:sp>
       <p:sp>
         <p:nvSpPr>
-          <p:cNvPr id="4" name="Oval 3"/>
+          <p:cNvPr id="4" name="deckgen:decor"/>
           <p:cNvSpPr/>
           <p:nvPr/>
         </p:nvSpPr>
@@ -11866,11 +11795,11 @@
         <p:spPr>
           <a:xfrm>
             <a:off x="1143000" y="3448050"/>
-            <a:ext cx="3482340" cy="619125"/>
+            <a:ext cx="3482340" cy="647700"/>
           </a:xfrm>
           <a:prstGeom prst="roundRect">
             <a:avLst>
-              <a:gd name="adj" fmla="val 6153"/>
+              <a:gd name="adj" fmla="val 5882"/>
             </a:avLst>
           </a:prstGeom>
           <a:solidFill>
@@ -11900,7 +11829,7 @@
         <p:spPr>
           <a:xfrm>
             <a:off x="1238250" y="3448050"/>
-            <a:ext cx="3291840" cy="619125"/>
+            <a:ext cx="3291840" cy="647700"/>
           </a:xfrm>
           <a:prstGeom prst="rect">
             <a:avLst/>
@@ -11941,11 +11870,11 @@
         <p:spPr>
           <a:xfrm>
             <a:off x="4663440" y="3448050"/>
-            <a:ext cx="7002780" cy="619125"/>
+            <a:ext cx="7002780" cy="647700"/>
           </a:xfrm>
           <a:prstGeom prst="roundRect">
             <a:avLst>
-              <a:gd name="adj" fmla="val 6153"/>
+              <a:gd name="adj" fmla="val 5882"/>
             </a:avLst>
           </a:prstGeom>
           <a:solidFill>
@@ -11975,7 +11904,7 @@
         <p:spPr>
           <a:xfrm>
             <a:off x="4758690" y="3448050"/>
-            <a:ext cx="6812280" cy="619125"/>
+            <a:ext cx="6812280" cy="647700"/>
           </a:xfrm>
           <a:prstGeom prst="rect">
             <a:avLst/>
@@ -12016,11 +11945,11 @@
         <p:spPr>
           <a:xfrm>
             <a:off x="11704320" y="3448050"/>
-            <a:ext cx="5440680" cy="619125"/>
+            <a:ext cx="5440680" cy="647700"/>
           </a:xfrm>
           <a:prstGeom prst="roundRect">
             <a:avLst>
-              <a:gd name="adj" fmla="val 6153"/>
+              <a:gd name="adj" fmla="val 5882"/>
             </a:avLst>
           </a:prstGeom>
           <a:solidFill>
@@ -12050,7 +11979,7 @@
         <p:spPr>
           <a:xfrm>
             <a:off x="11799570" y="3448050"/>
-            <a:ext cx="5250180" cy="619125"/>
+            <a:ext cx="5250180" cy="647700"/>
           </a:xfrm>
           <a:prstGeom prst="rect">
             <a:avLst/>
@@ -12090,12 +12019,12 @@
         </p:nvSpPr>
         <p:spPr>
           <a:xfrm>
-            <a:off x="1143000" y="4143375"/>
-            <a:ext cx="3482340" cy="619125"/>
+            <a:off x="1143000" y="4171950"/>
+            <a:ext cx="3482340" cy="647700"/>
           </a:xfrm>
           <a:prstGeom prst="roundRect">
             <a:avLst>
-              <a:gd name="adj" fmla="val 6153"/>
+              <a:gd name="adj" fmla="val 5882"/>
             </a:avLst>
           </a:prstGeom>
           <a:solidFill>
@@ -12124,8 +12053,8 @@
         </p:nvSpPr>
         <p:spPr>
           <a:xfrm>
-            <a:off x="1238250" y="4143375"/>
-            <a:ext cx="3291840" cy="619125"/>
+            <a:off x="1238250" y="4171950"/>
+            <a:ext cx="3291840" cy="647700"/>
           </a:xfrm>
           <a:prstGeom prst="rect">
             <a:avLst/>
@@ -12165,12 +12094,12 @@
         </p:nvSpPr>
         <p:spPr>
           <a:xfrm>
-            <a:off x="4663440" y="4143375"/>
-            <a:ext cx="7002780" cy="619125"/>
+            <a:off x="4663440" y="4171950"/>
+            <a:ext cx="7002780" cy="647700"/>
           </a:xfrm>
           <a:prstGeom prst="roundRect">
             <a:avLst>
-              <a:gd name="adj" fmla="val 6153"/>
+              <a:gd name="adj" fmla="val 5882"/>
             </a:avLst>
           </a:prstGeom>
           <a:solidFill>
@@ -12199,8 +12128,8 @@
         </p:nvSpPr>
         <p:spPr>
           <a:xfrm>
-            <a:off x="4758690" y="4143375"/>
-            <a:ext cx="6812280" cy="619125"/>
+            <a:off x="4758690" y="4171950"/>
+            <a:ext cx="6812280" cy="647700"/>
           </a:xfrm>
           <a:prstGeom prst="rect">
             <a:avLst/>
@@ -12240,12 +12169,12 @@
         </p:nvSpPr>
         <p:spPr>
           <a:xfrm>
-            <a:off x="11704320" y="4143375"/>
-            <a:ext cx="5440680" cy="619125"/>
+            <a:off x="11704320" y="4171950"/>
+            <a:ext cx="5440680" cy="647700"/>
           </a:xfrm>
           <a:prstGeom prst="roundRect">
             <a:avLst>
-              <a:gd name="adj" fmla="val 6153"/>
+              <a:gd name="adj" fmla="val 5882"/>
             </a:avLst>
           </a:prstGeom>
           <a:solidFill>
@@ -12274,8 +12203,8 @@
         </p:nvSpPr>
         <p:spPr>
           <a:xfrm>
-            <a:off x="11799570" y="4143375"/>
-            <a:ext cx="5250180" cy="619125"/>
+            <a:off x="11799570" y="4171950"/>
+            <a:ext cx="5250180" cy="647700"/>
           </a:xfrm>
           <a:prstGeom prst="rect">
             <a:avLst/>
@@ -12315,12 +12244,12 @@
         </p:nvSpPr>
         <p:spPr>
           <a:xfrm>
-            <a:off x="1143000" y="4838700"/>
-            <a:ext cx="3482340" cy="619125"/>
+            <a:off x="1143000" y="4895850"/>
+            <a:ext cx="3482340" cy="647700"/>
           </a:xfrm>
           <a:prstGeom prst="roundRect">
             <a:avLst>
-              <a:gd name="adj" fmla="val 6153"/>
+              <a:gd name="adj" fmla="val 5882"/>
             </a:avLst>
           </a:prstGeom>
           <a:solidFill>
@@ -12349,8 +12278,8 @@
         </p:nvSpPr>
         <p:spPr>
           <a:xfrm>
-            <a:off x="1238250" y="4838700"/>
-            <a:ext cx="3291840" cy="619125"/>
+            <a:off x="1238250" y="4895850"/>
+            <a:ext cx="3291840" cy="647700"/>
           </a:xfrm>
           <a:prstGeom prst="rect">
             <a:avLst/>
@@ -12390,12 +12319,12 @@
         </p:nvSpPr>
         <p:spPr>
           <a:xfrm>
-            <a:off x="4663440" y="4838700"/>
-            <a:ext cx="7002780" cy="619125"/>
+            <a:off x="4663440" y="4895850"/>
+            <a:ext cx="7002780" cy="647700"/>
           </a:xfrm>
           <a:prstGeom prst="roundRect">
             <a:avLst>
-              <a:gd name="adj" fmla="val 6153"/>
+              <a:gd name="adj" fmla="val 5882"/>
             </a:avLst>
           </a:prstGeom>
           <a:solidFill>
@@ -12424,8 +12353,8 @@
         </p:nvSpPr>
         <p:spPr>
           <a:xfrm>
-            <a:off x="4758690" y="4838700"/>
-            <a:ext cx="6812280" cy="619125"/>
+            <a:off x="4758690" y="4895850"/>
+            <a:ext cx="6812280" cy="647700"/>
           </a:xfrm>
           <a:prstGeom prst="rect">
             <a:avLst/>
@@ -12465,12 +12394,12 @@
         </p:nvSpPr>
         <p:spPr>
           <a:xfrm>
-            <a:off x="11704320" y="4838700"/>
-            <a:ext cx="5440680" cy="619125"/>
+            <a:off x="11704320" y="4895850"/>
+            <a:ext cx="5440680" cy="647700"/>
           </a:xfrm>
           <a:prstGeom prst="roundRect">
             <a:avLst>
-              <a:gd name="adj" fmla="val 6153"/>
+              <a:gd name="adj" fmla="val 5882"/>
             </a:avLst>
           </a:prstGeom>
           <a:solidFill>
@@ -12499,8 +12428,8 @@
         </p:nvSpPr>
         <p:spPr>
           <a:xfrm>
-            <a:off x="11799570" y="4838700"/>
-            <a:ext cx="5250180" cy="619125"/>
+            <a:off x="11799570" y="4895850"/>
+            <a:ext cx="5250180" cy="647700"/>
           </a:xfrm>
           <a:prstGeom prst="rect">
             <a:avLst/>
@@ -12540,12 +12469,12 @@
         </p:nvSpPr>
         <p:spPr>
           <a:xfrm>
-            <a:off x="1143000" y="5534025"/>
-            <a:ext cx="3482340" cy="619125"/>
+            <a:off x="1143000" y="5619750"/>
+            <a:ext cx="3482340" cy="647700"/>
           </a:xfrm>
           <a:prstGeom prst="roundRect">
             <a:avLst>
-              <a:gd name="adj" fmla="val 6153"/>
+              <a:gd name="adj" fmla="val 5882"/>
             </a:avLst>
           </a:prstGeom>
           <a:solidFill>
@@ -12574,8 +12503,8 @@
         </p:nvSpPr>
         <p:spPr>
           <a:xfrm>
-            <a:off x="1238250" y="5534025"/>
-            <a:ext cx="3291840" cy="619125"/>
+            <a:off x="1238250" y="5619750"/>
+            <a:ext cx="3291840" cy="647700"/>
           </a:xfrm>
           <a:prstGeom prst="rect">
             <a:avLst/>
@@ -12615,12 +12544,12 @@
         </p:nvSpPr>
         <p:spPr>
           <a:xfrm>
-            <a:off x="4663440" y="5534025"/>
-            <a:ext cx="7002780" cy="619125"/>
+            <a:off x="4663440" y="5619750"/>
+            <a:ext cx="7002780" cy="647700"/>
           </a:xfrm>
           <a:prstGeom prst="roundRect">
             <a:avLst>
-              <a:gd name="adj" fmla="val 6153"/>
+              <a:gd name="adj" fmla="val 5882"/>
             </a:avLst>
           </a:prstGeom>
           <a:solidFill>
@@ -12649,8 +12578,8 @@
         </p:nvSpPr>
         <p:spPr>
           <a:xfrm>
-            <a:off x="4758690" y="5534025"/>
-            <a:ext cx="6812280" cy="619125"/>
+            <a:off x="4758690" y="5619750"/>
+            <a:ext cx="6812280" cy="647700"/>
           </a:xfrm>
           <a:prstGeom prst="rect">
             <a:avLst/>
@@ -12690,12 +12619,12 @@
         </p:nvSpPr>
         <p:spPr>
           <a:xfrm>
-            <a:off x="11704320" y="5534025"/>
-            <a:ext cx="5440680" cy="619125"/>
+            <a:off x="11704320" y="5619750"/>
+            <a:ext cx="5440680" cy="647700"/>
           </a:xfrm>
           <a:prstGeom prst="roundRect">
             <a:avLst>
-              <a:gd name="adj" fmla="val 6153"/>
+              <a:gd name="adj" fmla="val 5882"/>
             </a:avLst>
           </a:prstGeom>
           <a:solidFill>
@@ -12724,8 +12653,8 @@
         </p:nvSpPr>
         <p:spPr>
           <a:xfrm>
-            <a:off x="11799570" y="5534025"/>
-            <a:ext cx="5250180" cy="619125"/>
+            <a:off x="11799570" y="5619750"/>
+            <a:ext cx="5250180" cy="647700"/>
           </a:xfrm>
           <a:prstGeom prst="rect">
             <a:avLst/>
@@ -12752,7 +12681,7 @@
                 <a:ea typeface="Pretendard"/>
                 <a:cs typeface="Pretendard"/>
               </a:rPr>
-              <a:t>index=False</a:t>
+              <a:t>user_segments 약 480 KB</a:t>
             </a:r>
           </a:p>
         </p:txBody>
@@ -12765,12 +12694,12 @@
         </p:nvSpPr>
         <p:spPr>
           <a:xfrm>
-            <a:off x="1143000" y="6229350"/>
-            <a:ext cx="3482340" cy="619125"/>
+            <a:off x="1143000" y="6343650"/>
+            <a:ext cx="3482340" cy="647700"/>
           </a:xfrm>
           <a:prstGeom prst="roundRect">
             <a:avLst>
-              <a:gd name="adj" fmla="val 6153"/>
+              <a:gd name="adj" fmla="val 5882"/>
             </a:avLst>
           </a:prstGeom>
           <a:solidFill>
@@ -12799,8 +12728,8 @@
         </p:nvSpPr>
         <p:spPr>
           <a:xfrm>
-            <a:off x="1238250" y="6229350"/>
-            <a:ext cx="3291840" cy="619125"/>
+            <a:off x="1238250" y="6343650"/>
+            <a:ext cx="3291840" cy="647700"/>
           </a:xfrm>
           <a:prstGeom prst="rect">
             <a:avLst/>
@@ -12840,12 +12769,12 @@
         </p:nvSpPr>
         <p:spPr>
           <a:xfrm>
-            <a:off x="4663440" y="6229350"/>
-            <a:ext cx="7002780" cy="619125"/>
+            <a:off x="4663440" y="6343650"/>
+            <a:ext cx="7002780" cy="647700"/>
           </a:xfrm>
           <a:prstGeom prst="roundRect">
             <a:avLst>
-              <a:gd name="adj" fmla="val 6153"/>
+              <a:gd name="adj" fmla="val 5882"/>
             </a:avLst>
           </a:prstGeom>
           <a:solidFill>
@@ -12874,8 +12803,8 @@
         </p:nvSpPr>
         <p:spPr>
           <a:xfrm>
-            <a:off x="4758690" y="6229350"/>
-            <a:ext cx="6812280" cy="619125"/>
+            <a:off x="4758690" y="6343650"/>
+            <a:ext cx="6812280" cy="647700"/>
           </a:xfrm>
           <a:prstGeom prst="rect">
             <a:avLst/>
@@ -12915,12 +12844,12 @@
         </p:nvSpPr>
         <p:spPr>
           <a:xfrm>
-            <a:off x="11704320" y="6229350"/>
-            <a:ext cx="5440680" cy="619125"/>
+            <a:off x="11704320" y="6343650"/>
+            <a:ext cx="5440680" cy="647700"/>
           </a:xfrm>
           <a:prstGeom prst="roundRect">
             <a:avLst>
-              <a:gd name="adj" fmla="val 6153"/>
+              <a:gd name="adj" fmla="val 5882"/>
             </a:avLst>
           </a:prstGeom>
           <a:solidFill>
@@ -12949,8 +12878,8 @@
         </p:nvSpPr>
         <p:spPr>
           <a:xfrm>
-            <a:off x="11799570" y="6229350"/>
-            <a:ext cx="5250180" cy="619125"/>
+            <a:off x="11799570" y="6343650"/>
+            <a:ext cx="5250180" cy="647700"/>
           </a:xfrm>
           <a:prstGeom prst="rect">
             <a:avLst/>
@@ -12977,239 +12906,14 @@
                 <a:ea typeface="Pretendard"/>
                 <a:cs typeface="Pretendard"/>
               </a:rPr>
-              <a:t>FORMAT parquet</a:t>
-            </a:r>
-          </a:p>
-        </p:txBody>
-      </p:sp>
-      <p:sp>
-        <p:nvSpPr>
-          <p:cNvPr id="44" name="Rounded Rectangle 43"/>
-          <p:cNvSpPr/>
-          <p:nvPr/>
-        </p:nvSpPr>
-        <p:spPr>
-          <a:xfrm>
-            <a:off x="1143000" y="6924675"/>
-            <a:ext cx="3482340" cy="619125"/>
-          </a:xfrm>
-          <a:prstGeom prst="roundRect">
-            <a:avLst>
-              <a:gd name="adj" fmla="val 6153"/>
-            </a:avLst>
-          </a:prstGeom>
-          <a:solidFill>
-            <a:srgbClr val="EDF3FD"/>
-          </a:solidFill>
-          <a:ln w="9525">
-            <a:solidFill>
-              <a:srgbClr val="BFD3F5"/>
-            </a:solidFill>
-          </a:ln>
-          <a:effectLst/>
-        </p:spPr>
-        <p:txBody>
-          <a:bodyPr rtlCol="0" anchor="ctr" wrap="square"/>
-          <a:lstStyle/>
-          <a:p>
-            <a:pPr algn="ctr"/>
-          </a:p>
-        </p:txBody>
-      </p:sp>
-      <p:sp>
-        <p:nvSpPr>
-          <p:cNvPr id="45" name="TextBox 44"/>
-          <p:cNvSpPr txBox="1"/>
-          <p:nvPr/>
-        </p:nvSpPr>
-        <p:spPr>
-          <a:xfrm>
-            <a:off x="1238250" y="6924675"/>
-            <a:ext cx="3291840" cy="619125"/>
-          </a:xfrm>
-          <a:prstGeom prst="rect">
-            <a:avLst/>
-          </a:prstGeom>
-          <a:noFill/>
-        </p:spPr>
-        <p:txBody>
-          <a:bodyPr wrap="square" lIns="0" rIns="0" tIns="0" bIns="0" anchor="ctr">
-            <a:spAutoFit/>
-          </a:bodyPr>
-          <a:lstStyle/>
-          <a:p>
-            <a:pPr algn="l">
-              <a:lnSpc>
-                <a:spcPct val="115000"/>
-              </a:lnSpc>
-            </a:pPr>
-            <a:r>
-              <a:rPr sz="1875" b="1">
-                <a:solidFill>
-                  <a:srgbClr val="0D2B5E"/>
-                </a:solidFill>
-                <a:latin typeface="Pretendard"/>
-                <a:ea typeface="Pretendard"/>
-                <a:cs typeface="Pretendard"/>
-              </a:rPr>
-              <a:t>확인</a:t>
-            </a:r>
-          </a:p>
-        </p:txBody>
-      </p:sp>
-      <p:sp>
-        <p:nvSpPr>
-          <p:cNvPr id="46" name="Rounded Rectangle 45"/>
-          <p:cNvSpPr/>
-          <p:nvPr/>
-        </p:nvSpPr>
-        <p:spPr>
-          <a:xfrm>
-            <a:off x="4663440" y="6924675"/>
-            <a:ext cx="7002780" cy="619125"/>
-          </a:xfrm>
-          <a:prstGeom prst="roundRect">
-            <a:avLst>
-              <a:gd name="adj" fmla="val 6153"/>
-            </a:avLst>
-          </a:prstGeom>
-          <a:solidFill>
-            <a:srgbClr val="FAFBFD"/>
-          </a:solidFill>
-          <a:ln w="9525">
-            <a:solidFill>
-              <a:srgbClr val="DCE1E8"/>
-            </a:solidFill>
-          </a:ln>
-          <a:effectLst/>
-        </p:spPr>
-        <p:txBody>
-          <a:bodyPr rtlCol="0" anchor="ctr" wrap="square"/>
-          <a:lstStyle/>
-          <a:p>
-            <a:pPr algn="ctr"/>
-          </a:p>
-        </p:txBody>
-      </p:sp>
-      <p:sp>
-        <p:nvSpPr>
-          <p:cNvPr id="47" name="TextBox 46"/>
-          <p:cNvSpPr txBox="1"/>
-          <p:nvPr/>
-        </p:nvSpPr>
-        <p:spPr>
-          <a:xfrm>
-            <a:off x="4758690" y="6924675"/>
-            <a:ext cx="6812280" cy="619125"/>
-          </a:xfrm>
-          <a:prstGeom prst="rect">
-            <a:avLst/>
-          </a:prstGeom>
-          <a:noFill/>
-        </p:spPr>
-        <p:txBody>
-          <a:bodyPr wrap="square" lIns="0" rIns="0" tIns="0" bIns="0" anchor="ctr">
-            <a:spAutoFit/>
-          </a:bodyPr>
-          <a:lstStyle/>
-          <a:p>
-            <a:pPr algn="ctr">
-              <a:lnSpc>
-                <a:spcPct val="115000"/>
-              </a:lnSpc>
-            </a:pPr>
-            <a:r>
-              <a:rPr sz="1875" b="0">
-                <a:solidFill>
-                  <a:srgbClr val="3D3D3D"/>
-                </a:solidFill>
-                <a:latin typeface="Pretendard"/>
-                <a:ea typeface="Pretendard"/>
-                <a:cs typeface="Pretendard"/>
-              </a:rPr>
-              <a:t>os.path.getsize 로 KB</a:t>
-            </a:r>
-          </a:p>
-        </p:txBody>
-      </p:sp>
-      <p:sp>
-        <p:nvSpPr>
-          <p:cNvPr id="48" name="Rounded Rectangle 47"/>
-          <p:cNvSpPr/>
-          <p:nvPr/>
-        </p:nvSpPr>
-        <p:spPr>
-          <a:xfrm>
-            <a:off x="11704320" y="6924675"/>
-            <a:ext cx="5440680" cy="619125"/>
-          </a:xfrm>
-          <a:prstGeom prst="roundRect">
-            <a:avLst>
-              <a:gd name="adj" fmla="val 6153"/>
-            </a:avLst>
-          </a:prstGeom>
-          <a:solidFill>
-            <a:srgbClr val="FAFBFD"/>
-          </a:solidFill>
-          <a:ln w="9525">
-            <a:solidFill>
-              <a:srgbClr val="DCE1E8"/>
-            </a:solidFill>
-          </a:ln>
-          <a:effectLst/>
-        </p:spPr>
-        <p:txBody>
-          <a:bodyPr rtlCol="0" anchor="ctr" wrap="square"/>
-          <a:lstStyle/>
-          <a:p>
-            <a:pPr algn="ctr"/>
-          </a:p>
-        </p:txBody>
-      </p:sp>
-      <p:sp>
-        <p:nvSpPr>
-          <p:cNvPr id="49" name="TextBox 48"/>
-          <p:cNvSpPr txBox="1"/>
-          <p:nvPr/>
-        </p:nvSpPr>
-        <p:spPr>
-          <a:xfrm>
-            <a:off x="11799570" y="6924675"/>
-            <a:ext cx="5250180" cy="619125"/>
-          </a:xfrm>
-          <a:prstGeom prst="rect">
-            <a:avLst/>
-          </a:prstGeom>
-          <a:noFill/>
-        </p:spPr>
-        <p:txBody>
-          <a:bodyPr wrap="square" lIns="0" rIns="0" tIns="0" bIns="0" anchor="ctr">
-            <a:spAutoFit/>
-          </a:bodyPr>
-          <a:lstStyle/>
-          <a:p>
-            <a:pPr algn="ctr">
-              <a:lnSpc>
-                <a:spcPct val="115000"/>
-              </a:lnSpc>
-            </a:pPr>
-            <a:r>
-              <a:rPr sz="1875" b="0">
-                <a:solidFill>
-                  <a:srgbClr val="3D3D3D"/>
-                </a:solidFill>
-                <a:latin typeface="Pretendard"/>
-                <a:ea typeface="Pretendard"/>
-                <a:cs typeface="Pretendard"/>
-              </a:rPr>
-              <a:t>두 파일이 생긴다</a:t>
-            </a:r>
-          </a:p>
-        </p:txBody>
-      </p:sp>
-      <p:sp>
-        <p:nvSpPr>
-          <p:cNvPr id="50" name="TextBox 49"/>
+              <a:t>segment_summary 0.6 KB</a:t>
+            </a:r>
+          </a:p>
+        </p:txBody>
+      </p:sp>
+      <p:sp>
+        <p:nvSpPr>
+          <p:cNvPr id="44" name="TextBox 43"/>
           <p:cNvSpPr txBox="1"/>
           <p:nvPr/>
         </p:nvSpPr>
@@ -13243,14 +12947,14 @@
                 <a:ea typeface="Pretendard"/>
                 <a:cs typeface="Pretendard"/>
               </a:rPr>
-              <a:t>어느 쪽으로 저장하든 결과는 같은 Parquet — 이후 어느 도구로든 읽을 수 있다</a:t>
-            </a:r>
-          </a:p>
-        </p:txBody>
-      </p:sp>
-      <p:sp>
-        <p:nvSpPr>
-          <p:cNvPr id="51" name="Rectangle 50"/>
+              <a:t>어느 쪽으로 저장하든 같은 Parquet — 크기는 행 순서에 따라 조금씩 달라진다</a:t>
+            </a:r>
+          </a:p>
+        </p:txBody>
+      </p:sp>
+      <p:sp>
+        <p:nvSpPr>
+          <p:cNvPr id="45" name="Rectangle 44"/>
           <p:cNvSpPr/>
           <p:nvPr/>
         </p:nvSpPr>
@@ -13280,7 +12984,7 @@
       </p:sp>
       <p:sp>
         <p:nvSpPr>
-          <p:cNvPr id="52" name="TextBox 51"/>
+          <p:cNvPr id="46" name="TextBox 45"/>
           <p:cNvSpPr txBox="1"/>
           <p:nvPr/>
         </p:nvSpPr>
@@ -13321,7 +13025,7 @@
       </p:sp>
       <p:sp>
         <p:nvSpPr>
-          <p:cNvPr id="53" name="TextBox 52"/>
+          <p:cNvPr id="47" name="TextBox 46"/>
           <p:cNvSpPr txBox="1"/>
           <p:nvPr/>
         </p:nvSpPr>
@@ -13380,7 +13084,7 @@
       <p:grpSpPr/>
       <p:sp>
         <p:nvSpPr>
-          <p:cNvPr id="2" name="Oval 1"/>
+          <p:cNvPr id="2" name="deckgen:decor"/>
           <p:cNvSpPr/>
           <p:nvPr/>
         </p:nvSpPr>
@@ -13410,7 +13114,7 @@
       </p:sp>
       <p:sp>
         <p:nvSpPr>
-          <p:cNvPr id="3" name="Oval 2"/>
+          <p:cNvPr id="3" name="deckgen:decor"/>
           <p:cNvSpPr/>
           <p:nvPr/>
         </p:nvSpPr>
@@ -13440,7 +13144,7 @@
       </p:sp>
       <p:sp>
         <p:nvSpPr>
-          <p:cNvPr id="4" name="Oval 3"/>
+          <p:cNvPr id="4" name="deckgen:decor"/>
           <p:cNvSpPr/>
           <p:nvPr/>
         </p:nvSpPr>
@@ -13504,7 +13208,7 @@
                 <a:ea typeface="Pretendard"/>
                 <a:cs typeface="Pretendard"/>
               </a:rPr>
-              <a:t>5단계 — 일부러 실패시키기</a:t>
+              <a:t>5단계 — df_cost.py 단독</a:t>
             </a:r>
           </a:p>
         </p:txBody>
@@ -13657,7 +13361,7 @@
                 <a:ea typeface="Pretendard"/>
                 <a:cs typeface="Pretendard"/>
               </a:rPr>
-              <a:t>100만 행이 통째로 DataFrame 으로</a:t>
+              <a:t>1,000,000행이 통째로 DataFrame 으로</a:t>
             </a:r>
           </a:p>
         </p:txBody>
@@ -13835,7 +13539,7 @@
                 <a:ea typeface="Pretendard"/>
                 <a:cs typeface="Pretendard"/>
               </a:rPr>
-              <a:t>time.perf_counter() 로 잰다</a:t>
+              <a:t>1초 안쪽(0.3~0.9초)</a:t>
             </a:r>
           </a:p>
         </p:txBody>
@@ -13979,7 +13683,7 @@
                 <a:ea typeface="Pretendard"/>
                 <a:cs typeface="Pretendard"/>
               </a:rPr>
-              <a:t>memory_usage(deep=True) 수백 MB</a:t>
+              <a:t>42 MB</a:t>
             </a:r>
           </a:p>
         </p:txBody>
@@ -14383,7 +14087,7 @@
                 <a:ea typeface="Pretendard"/>
                 <a:cs typeface="Pretendard"/>
               </a:rPr>
-              <a:t>순식간</a:t>
+              <a:t>0.01초</a:t>
             </a:r>
           </a:p>
         </p:txBody>
@@ -14527,7 +14231,7 @@
                 <a:ea typeface="Pretendard"/>
                 <a:cs typeface="Pretendard"/>
               </a:rPr>
-              <a:t>KB 단위</a:t>
+              <a:t>191 bytes</a:t>
             </a:r>
           </a:p>
         </p:txBody>
@@ -14598,7 +14302,7 @@
                 <a:ea typeface="Pretendard"/>
                 <a:cs typeface="Pretendard"/>
               </a:rPr>
-              <a:t>규칙</a:t>
+              <a:t>차이</a:t>
             </a:r>
           </a:p>
         </p:txBody>
@@ -14671,7 +14375,7 @@
                 <a:ea typeface="Pretendard"/>
                 <a:cs typeface="Pretendard"/>
               </a:rPr>
-              <a:t>변환은 항상 「작아진 다음」</a:t>
+              <a:t>메모리로 20만 배 넘게</a:t>
             </a:r>
           </a:p>
         </p:txBody>
@@ -14879,7 +14583,7 @@
       <p:grpSpPr/>
       <p:sp>
         <p:nvSpPr>
-          <p:cNvPr id="2" name="Oval 1"/>
+          <p:cNvPr id="2" name="deckgen:decor"/>
           <p:cNvSpPr/>
           <p:nvPr/>
         </p:nvSpPr>
@@ -14909,7 +14613,7 @@
       </p:sp>
       <p:sp>
         <p:nvSpPr>
-          <p:cNvPr id="3" name="Oval 2"/>
+          <p:cNvPr id="3" name="deckgen:decor"/>
           <p:cNvSpPr/>
           <p:nvPr/>
         </p:nvSpPr>
@@ -14939,7 +14643,7 @@
       </p:sp>
       <p:sp>
         <p:nvSpPr>
-          <p:cNvPr id="4" name="Oval 3"/>
+          <p:cNvPr id="4" name="deckgen:decor"/>
           <p:cNvSpPr/>
           <p:nvPr/>
         </p:nvSpPr>
@@ -15841,7 +15545,7 @@
                 <a:ea typeface="Pretendard"/>
                 <a:cs typeface="Pretendard"/>
               </a:rPr>
-              <a:t>정답 예시 — 퍼널</a:t>
+              <a:t>정답 예시 — funnel.py 단독</a:t>
             </a:r>
           </a:p>
           <a:p>
@@ -15862,7 +15566,7 @@
                 <a:ea typeface="Pretendard"/>
                 <a:cs typeface="Pretendard"/>
               </a:rPr>
-              <a:t>per_user 에서 max(CASE WHEN …) 으로 viewed·carted·bought 를 만들고 합산</a:t>
+              <a:t>viewed 50000 · carted 47525 · bought 31501 → 95.1 · 66.3</a:t>
             </a:r>
           </a:p>
         </p:txBody>
